--- a/plantillas/ogkv/ogkv_kyu_midori_saifa.pptx
+++ b/plantillas/ogkv/ogkv_kyu_midori_saifa.pptx
@@ -293,7 +293,7 @@
             <a:fld id="{482D01FC-0025-4FA3-946F-2204CE555972}" type="datetimeFigureOut">
               <a:rPr lang="es-VE" altLang="es-VE"/>
               <a:pPr/>
-              <a:t>3/3/2026</a:t>
+              <a:t>6/3/2026</a:t>
             </a:fld>
             <a:endParaRPr lang="es-VE" altLang="es-VE"/>
           </a:p>
@@ -573,7 +573,7 @@
             <a:fld id="{4DA8898B-76CB-4B55-B655-3233B63DAA7C}" type="datetimeFigureOut">
               <a:rPr lang="es-VE" altLang="es-VE"/>
               <a:pPr/>
-              <a:t>3/3/2026</a:t>
+              <a:t>6/3/2026</a:t>
             </a:fld>
             <a:endParaRPr lang="es-VE" altLang="es-VE"/>
           </a:p>
@@ -1130,6 +1130,275 @@
       </p:pic>
       <p:sp>
         <p:nvSpPr>
+          <p:cNvPr id="39" name="78 CuadroTexto"/>
+          <p:cNvSpPr txBox="1">
+            <a:spLocks noChangeArrowheads="1"/>
+          </p:cNvSpPr>
+          <p:nvPr/>
+        </p:nvSpPr>
+        <p:spPr bwMode="auto">
+          <a:xfrm>
+            <a:off x="4806826" y="3744317"/>
+            <a:ext cx="991121" cy="4760913"/>
+          </a:xfrm>
+          <a:prstGeom prst="rect">
+            <a:avLst/>
+          </a:prstGeom>
+          <a:noFill/>
+          <a:ln>
+            <a:noFill/>
+          </a:ln>
+          <a:extLst>
+            <a:ext uri="{909E8E84-426E-40DD-AFC4-6F175D3DCCD1}">
+              <a14:hiddenFill xmlns:a14="http://schemas.microsoft.com/office/drawing/2010/main">
+                <a:solidFill>
+                  <a:srgbClr val="FFFFFF"/>
+                </a:solidFill>
+              </a14:hiddenFill>
+            </a:ext>
+            <a:ext uri="{91240B29-F687-4F45-9708-019B960494DF}">
+              <a14:hiddenLine xmlns:a14="http://schemas.microsoft.com/office/drawing/2010/main" w="9525">
+                <a:solidFill>
+                  <a:srgbClr val="000000"/>
+                </a:solidFill>
+                <a:miter lim="800000"/>
+                <a:headEnd/>
+                <a:tailEnd/>
+              </a14:hiddenLine>
+            </a:ext>
+          </a:extLst>
+        </p:spPr>
+        <p:txBody>
+          <a:bodyPr vert="eaVert" lIns="79288" tIns="39644" rIns="79288" bIns="39644">
+            <a:spAutoFit/>
+          </a:bodyPr>
+          <a:lstStyle>
+            <a:lvl1pPr>
+              <a:defRPr sz="2900">
+                <a:solidFill>
+                  <a:schemeClr val="tx1"/>
+                </a:solidFill>
+                <a:latin typeface="Arial" charset="0"/>
+                <a:cs typeface="Arial" charset="0"/>
+              </a:defRPr>
+            </a:lvl1pPr>
+            <a:lvl2pPr marL="742950" indent="-285750">
+              <a:defRPr sz="2900">
+                <a:solidFill>
+                  <a:schemeClr val="tx1"/>
+                </a:solidFill>
+                <a:latin typeface="Arial" charset="0"/>
+                <a:cs typeface="Arial" charset="0"/>
+              </a:defRPr>
+            </a:lvl2pPr>
+            <a:lvl3pPr marL="1143000" indent="-228600">
+              <a:defRPr sz="2900">
+                <a:solidFill>
+                  <a:schemeClr val="tx1"/>
+                </a:solidFill>
+                <a:latin typeface="Arial" charset="0"/>
+                <a:cs typeface="Arial" charset="0"/>
+              </a:defRPr>
+            </a:lvl3pPr>
+            <a:lvl4pPr marL="1600200" indent="-228600">
+              <a:defRPr sz="2900">
+                <a:solidFill>
+                  <a:schemeClr val="tx1"/>
+                </a:solidFill>
+                <a:latin typeface="Arial" charset="0"/>
+                <a:cs typeface="Arial" charset="0"/>
+              </a:defRPr>
+            </a:lvl4pPr>
+            <a:lvl5pPr marL="2057400" indent="-228600">
+              <a:defRPr sz="2900">
+                <a:solidFill>
+                  <a:schemeClr val="tx1"/>
+                </a:solidFill>
+                <a:latin typeface="Arial" charset="0"/>
+                <a:cs typeface="Arial" charset="0"/>
+              </a:defRPr>
+            </a:lvl5pPr>
+            <a:lvl6pPr marL="2514600" indent="-228600" defTabSz="1443038" eaLnBrk="0" fontAlgn="base" hangingPunct="0">
+              <a:spcBef>
+                <a:spcPct val="0"/>
+              </a:spcBef>
+              <a:spcAft>
+                <a:spcPct val="0"/>
+              </a:spcAft>
+              <a:defRPr sz="2900">
+                <a:solidFill>
+                  <a:schemeClr val="tx1"/>
+                </a:solidFill>
+                <a:latin typeface="Arial" charset="0"/>
+                <a:cs typeface="Arial" charset="0"/>
+              </a:defRPr>
+            </a:lvl6pPr>
+            <a:lvl7pPr marL="2971800" indent="-228600" defTabSz="1443038" eaLnBrk="0" fontAlgn="base" hangingPunct="0">
+              <a:spcBef>
+                <a:spcPct val="0"/>
+              </a:spcBef>
+              <a:spcAft>
+                <a:spcPct val="0"/>
+              </a:spcAft>
+              <a:defRPr sz="2900">
+                <a:solidFill>
+                  <a:schemeClr val="tx1"/>
+                </a:solidFill>
+                <a:latin typeface="Arial" charset="0"/>
+                <a:cs typeface="Arial" charset="0"/>
+              </a:defRPr>
+            </a:lvl7pPr>
+            <a:lvl8pPr marL="3429000" indent="-228600" defTabSz="1443038" eaLnBrk="0" fontAlgn="base" hangingPunct="0">
+              <a:spcBef>
+                <a:spcPct val="0"/>
+              </a:spcBef>
+              <a:spcAft>
+                <a:spcPct val="0"/>
+              </a:spcAft>
+              <a:defRPr sz="2900">
+                <a:solidFill>
+                  <a:schemeClr val="tx1"/>
+                </a:solidFill>
+                <a:latin typeface="Arial" charset="0"/>
+                <a:cs typeface="Arial" charset="0"/>
+              </a:defRPr>
+            </a:lvl8pPr>
+            <a:lvl9pPr marL="3886200" indent="-228600" defTabSz="1443038" eaLnBrk="0" fontAlgn="base" hangingPunct="0">
+              <a:spcBef>
+                <a:spcPct val="0"/>
+              </a:spcBef>
+              <a:spcAft>
+                <a:spcPct val="0"/>
+              </a:spcAft>
+              <a:defRPr sz="2900">
+                <a:solidFill>
+                  <a:schemeClr val="tx1"/>
+                </a:solidFill>
+                <a:latin typeface="Arial" charset="0"/>
+                <a:cs typeface="Arial" charset="0"/>
+              </a:defRPr>
+            </a:lvl9pPr>
+          </a:lstStyle>
+          <a:p>
+            <a:pPr eaLnBrk="1" hangingPunct="1"/>
+            <a:r>
+              <a:rPr lang="ja-JP" altLang="es-VE" sz="5400" dirty="0" smtClean="0">
+                <a:solidFill>
+                  <a:srgbClr val="000000"/>
+                </a:solidFill>
+                <a:latin typeface="EPSON 太行書体Ｂ" pitchFamily="65" charset="-128"/>
+                <a:ea typeface="EPSON 太行書体Ｂ" pitchFamily="65" charset="-128"/>
+              </a:rPr>
+              <a:t>二</a:t>
+            </a:r>
+            <a:r>
+              <a:rPr lang="ja-JP" altLang="es-VE" sz="5400" dirty="0">
+                <a:solidFill>
+                  <a:srgbClr val="000000"/>
+                </a:solidFill>
+                <a:latin typeface="EPSON 太行書体Ｂ" pitchFamily="65" charset="-128"/>
+                <a:ea typeface="EPSON 太行書体Ｂ" pitchFamily="65" charset="-128"/>
+              </a:rPr>
+              <a:t>允許ス</a:t>
+            </a:r>
+            <a:endParaRPr lang="es-VE" altLang="es-VE" sz="5400" dirty="0">
+              <a:solidFill>
+                <a:srgbClr val="000000"/>
+              </a:solidFill>
+              <a:latin typeface="EPSON 太行書体Ｂ" pitchFamily="65" charset="-128"/>
+              <a:ea typeface="EPSON 太行書体Ｂ" pitchFamily="65" charset="-128"/>
+            </a:endParaRPr>
+          </a:p>
+        </p:txBody>
+      </p:sp>
+      <p:sp>
+        <p:nvSpPr>
+          <p:cNvPr id="35" name="34 Rectángulo"/>
+          <p:cNvSpPr/>
+          <p:nvPr/>
+        </p:nvSpPr>
+        <p:spPr>
+          <a:xfrm>
+            <a:off x="8407400" y="2418542"/>
+            <a:ext cx="432048" cy="1446550"/>
+          </a:xfrm>
+          <a:prstGeom prst="rect">
+            <a:avLst/>
+          </a:prstGeom>
+        </p:spPr>
+        <p:txBody>
+          <a:bodyPr>
+            <a:spAutoFit/>
+          </a:bodyPr>
+          <a:lstStyle/>
+          <a:p>
+            <a:pPr algn="ctr" eaLnBrk="1" hangingPunct="1">
+              <a:defRPr/>
+            </a:pPr>
+            <a:r>
+              <a:rPr lang="es-MX" altLang="ja-JP" sz="2000" spc="-300" dirty="0" smtClean="0">
+                <a:ln w="6350">
+                  <a:solidFill>
+                    <a:prstClr val="black"/>
+                  </a:solidFill>
+                </a:ln>
+                <a:solidFill>
+                  <a:prstClr val="black"/>
+                </a:solidFill>
+                <a:latin typeface="EPSON 太行書体Ｂ" pitchFamily="65" charset="-128"/>
+                <a:ea typeface="EPSON 太行書体Ｂ" pitchFamily="65" charset="-128"/>
+              </a:rPr>
+              <a:t>{{cd}}</a:t>
+            </a:r>
+            <a:endParaRPr lang="es-MX" altLang="ja-JP" sz="2000" spc="-300" dirty="0">
+              <a:ln w="6350">
+                <a:solidFill>
+                  <a:prstClr val="black"/>
+                </a:solidFill>
+              </a:ln>
+              <a:solidFill>
+                <a:prstClr val="black"/>
+              </a:solidFill>
+              <a:latin typeface="EPSON 太行書体Ｂ" pitchFamily="65" charset="-128"/>
+              <a:ea typeface="EPSON 太行書体Ｂ" pitchFamily="65" charset="-128"/>
+            </a:endParaRPr>
+          </a:p>
+          <a:p>
+            <a:pPr algn="ctr" eaLnBrk="1" hangingPunct="1">
+              <a:defRPr/>
+            </a:pPr>
+            <a:r>
+              <a:rPr lang="ja-JP" altLang="es-VE" sz="2800" dirty="0">
+                <a:ln w="6350">
+                  <a:solidFill>
+                    <a:prstClr val="black"/>
+                  </a:solidFill>
+                </a:ln>
+                <a:solidFill>
+                  <a:prstClr val="black"/>
+                </a:solidFill>
+                <a:latin typeface="Batang" pitchFamily="18" charset="-127"/>
+                <a:ea typeface="イワタ行書" pitchFamily="1" charset="-128"/>
+              </a:rPr>
+              <a:t>　</a:t>
+            </a:r>
+            <a:endParaRPr lang="es-VE" sz="2800" dirty="0">
+              <a:ln w="6350">
+                <a:solidFill>
+                  <a:prstClr val="black"/>
+                </a:solidFill>
+              </a:ln>
+              <a:solidFill>
+                <a:prstClr val="black"/>
+              </a:solidFill>
+              <a:latin typeface="Batang" pitchFamily="18" charset="-127"/>
+              <a:ea typeface="イワタ行書" pitchFamily="1" charset="-128"/>
+            </a:endParaRPr>
+          </a:p>
+        </p:txBody>
+      </p:sp>
+      <p:sp>
+        <p:nvSpPr>
           <p:cNvPr id="5123" name="10 CuadroTexto"/>
           <p:cNvSpPr txBox="1">
             <a:spLocks noChangeArrowheads="1"/>
@@ -1282,13 +1551,13 @@
           <a:p>
             <a:pPr algn="ctr" eaLnBrk="1" hangingPunct="1"/>
             <a:r>
-              <a:rPr lang="es-VE" altLang="es-VE" sz="2600">
+              <a:rPr lang="es-VE" altLang="es-VE" sz="2600" dirty="0">
                 <a:latin typeface="Arial Black" pitchFamily="34" charset="0"/>
               </a:rPr>
               <a:t>ORGANIZACIÓN  GOJYU RYU  KARATE DO                                                                                 DE VENEZUELA                                                                                              </a:t>
             </a:r>
             <a:r>
-              <a:rPr lang="es-VE" altLang="es-VE" sz="3100">
+              <a:rPr lang="es-VE" altLang="es-VE" sz="3100" dirty="0">
                 <a:latin typeface="Arial Black" pitchFamily="34" charset="0"/>
               </a:rPr>
               <a:t>O.G.K.V.</a:t>
@@ -1511,441 +1780,6 @@
       </p:sp>
       <p:sp>
         <p:nvSpPr>
-          <p:cNvPr id="5126" name="20 CuadroTexto"/>
-          <p:cNvSpPr txBox="1">
-            <a:spLocks noChangeArrowheads="1"/>
-          </p:cNvSpPr>
-          <p:nvPr/>
-        </p:nvSpPr>
-        <p:spPr bwMode="auto">
-          <a:xfrm>
-            <a:off x="1077913" y="10201275"/>
-            <a:ext cx="7977187" cy="1557338"/>
-          </a:xfrm>
-          <a:prstGeom prst="rect">
-            <a:avLst/>
-          </a:prstGeom>
-          <a:noFill/>
-          <a:ln>
-            <a:noFill/>
-          </a:ln>
-          <a:extLst>
-            <a:ext uri="{909E8E84-426E-40DD-AFC4-6F175D3DCCD1}">
-              <a14:hiddenFill xmlns:a14="http://schemas.microsoft.com/office/drawing/2010/main">
-                <a:solidFill>
-                  <a:srgbClr val="FFFFFF"/>
-                </a:solidFill>
-              </a14:hiddenFill>
-            </a:ext>
-            <a:ext uri="{91240B29-F687-4F45-9708-019B960494DF}">
-              <a14:hiddenLine xmlns:a14="http://schemas.microsoft.com/office/drawing/2010/main" w="9525">
-                <a:solidFill>
-                  <a:srgbClr val="000000"/>
-                </a:solidFill>
-                <a:miter lim="800000"/>
-                <a:headEnd/>
-                <a:tailEnd/>
-              </a14:hiddenLine>
-            </a:ext>
-          </a:extLst>
-        </p:spPr>
-        <p:txBody>
-          <a:bodyPr lIns="79288" tIns="39644" rIns="79288" bIns="39644">
-            <a:spAutoFit/>
-          </a:bodyPr>
-          <a:lstStyle>
-            <a:lvl1pPr>
-              <a:defRPr sz="2900">
-                <a:solidFill>
-                  <a:schemeClr val="tx1"/>
-                </a:solidFill>
-                <a:latin typeface="Arial" charset="0"/>
-                <a:cs typeface="Arial" charset="0"/>
-              </a:defRPr>
-            </a:lvl1pPr>
-            <a:lvl2pPr marL="742950" indent="-285750">
-              <a:defRPr sz="2900">
-                <a:solidFill>
-                  <a:schemeClr val="tx1"/>
-                </a:solidFill>
-                <a:latin typeface="Arial" charset="0"/>
-                <a:cs typeface="Arial" charset="0"/>
-              </a:defRPr>
-            </a:lvl2pPr>
-            <a:lvl3pPr marL="1143000" indent="-228600">
-              <a:defRPr sz="2900">
-                <a:solidFill>
-                  <a:schemeClr val="tx1"/>
-                </a:solidFill>
-                <a:latin typeface="Arial" charset="0"/>
-                <a:cs typeface="Arial" charset="0"/>
-              </a:defRPr>
-            </a:lvl3pPr>
-            <a:lvl4pPr marL="1600200" indent="-228600">
-              <a:defRPr sz="2900">
-                <a:solidFill>
-                  <a:schemeClr val="tx1"/>
-                </a:solidFill>
-                <a:latin typeface="Arial" charset="0"/>
-                <a:cs typeface="Arial" charset="0"/>
-              </a:defRPr>
-            </a:lvl4pPr>
-            <a:lvl5pPr marL="2057400" indent="-228600">
-              <a:defRPr sz="2900">
-                <a:solidFill>
-                  <a:schemeClr val="tx1"/>
-                </a:solidFill>
-                <a:latin typeface="Arial" charset="0"/>
-                <a:cs typeface="Arial" charset="0"/>
-              </a:defRPr>
-            </a:lvl5pPr>
-            <a:lvl6pPr marL="2514600" indent="-228600" defTabSz="1443038" eaLnBrk="0" fontAlgn="base" hangingPunct="0">
-              <a:spcBef>
-                <a:spcPct val="0"/>
-              </a:spcBef>
-              <a:spcAft>
-                <a:spcPct val="0"/>
-              </a:spcAft>
-              <a:defRPr sz="2900">
-                <a:solidFill>
-                  <a:schemeClr val="tx1"/>
-                </a:solidFill>
-                <a:latin typeface="Arial" charset="0"/>
-                <a:cs typeface="Arial" charset="0"/>
-              </a:defRPr>
-            </a:lvl6pPr>
-            <a:lvl7pPr marL="2971800" indent="-228600" defTabSz="1443038" eaLnBrk="0" fontAlgn="base" hangingPunct="0">
-              <a:spcBef>
-                <a:spcPct val="0"/>
-              </a:spcBef>
-              <a:spcAft>
-                <a:spcPct val="0"/>
-              </a:spcAft>
-              <a:defRPr sz="2900">
-                <a:solidFill>
-                  <a:schemeClr val="tx1"/>
-                </a:solidFill>
-                <a:latin typeface="Arial" charset="0"/>
-                <a:cs typeface="Arial" charset="0"/>
-              </a:defRPr>
-            </a:lvl7pPr>
-            <a:lvl8pPr marL="3429000" indent="-228600" defTabSz="1443038" eaLnBrk="0" fontAlgn="base" hangingPunct="0">
-              <a:spcBef>
-                <a:spcPct val="0"/>
-              </a:spcBef>
-              <a:spcAft>
-                <a:spcPct val="0"/>
-              </a:spcAft>
-              <a:defRPr sz="2900">
-                <a:solidFill>
-                  <a:schemeClr val="tx1"/>
-                </a:solidFill>
-                <a:latin typeface="Arial" charset="0"/>
-                <a:cs typeface="Arial" charset="0"/>
-              </a:defRPr>
-            </a:lvl8pPr>
-            <a:lvl9pPr marL="3886200" indent="-228600" defTabSz="1443038" eaLnBrk="0" fontAlgn="base" hangingPunct="0">
-              <a:spcBef>
-                <a:spcPct val="0"/>
-              </a:spcBef>
-              <a:spcAft>
-                <a:spcPct val="0"/>
-              </a:spcAft>
-              <a:defRPr sz="2900">
-                <a:solidFill>
-                  <a:schemeClr val="tx1"/>
-                </a:solidFill>
-                <a:latin typeface="Arial" charset="0"/>
-                <a:cs typeface="Arial" charset="0"/>
-              </a:defRPr>
-            </a:lvl9pPr>
-          </a:lstStyle>
-          <a:p>
-            <a:pPr algn="ctr" eaLnBrk="1" hangingPunct="1"/>
-            <a:r>
-              <a:rPr lang="es-VE" altLang="es-VE" sz="2400" i="1">
-                <a:latin typeface="Times New Roman" pitchFamily="18" charset="0"/>
-                <a:cs typeface="Times New Roman" pitchFamily="18" charset="0"/>
-              </a:rPr>
-              <a:t>Ha presentado satisfactoriamente su examen reglamentario, demostrando gran aplicación en el aprendizaje del                   </a:t>
-            </a:r>
-            <a:r>
-              <a:rPr lang="es-VE" altLang="es-VE" sz="2400" b="1" i="1">
-                <a:latin typeface="Times New Roman" pitchFamily="18" charset="0"/>
-                <a:cs typeface="Times New Roman" pitchFamily="18" charset="0"/>
-              </a:rPr>
-              <a:t>Karate - Do </a:t>
-            </a:r>
-            <a:r>
-              <a:rPr lang="es-VE" altLang="es-VE" sz="2400" i="1">
-                <a:latin typeface="Times New Roman" pitchFamily="18" charset="0"/>
-                <a:cs typeface="Times New Roman" pitchFamily="18" charset="0"/>
-              </a:rPr>
-              <a:t>estilo </a:t>
-            </a:r>
-            <a:r>
-              <a:rPr lang="es-VE" altLang="es-VE" sz="2400" b="1" i="1">
-                <a:latin typeface="Times New Roman" pitchFamily="18" charset="0"/>
-                <a:cs typeface="Times New Roman" pitchFamily="18" charset="0"/>
-              </a:rPr>
-              <a:t>Okinawa Gojyu - Ryu </a:t>
-            </a:r>
-            <a:r>
-              <a:rPr lang="es-VE" altLang="es-VE" sz="2400" i="1">
-                <a:latin typeface="Times New Roman" pitchFamily="18" charset="0"/>
-                <a:cs typeface="Times New Roman" pitchFamily="18" charset="0"/>
-              </a:rPr>
-              <a:t>y en Virtud de su progreso se le otorga el grado de: </a:t>
-            </a:r>
-            <a:r>
-              <a:rPr lang="es-VE" altLang="es-VE" sz="2400" b="1" i="1">
-                <a:solidFill>
-                  <a:srgbClr val="FF0000"/>
-                </a:solidFill>
-                <a:latin typeface="Times New Roman" pitchFamily="18" charset="0"/>
-                <a:cs typeface="Times New Roman" pitchFamily="18" charset="0"/>
-              </a:rPr>
-              <a:t>Cinturón Azul 3° Kyu.</a:t>
-            </a:r>
-            <a:endParaRPr lang="es-VE" altLang="es-VE" sz="2400" i="1">
-              <a:solidFill>
-                <a:srgbClr val="FF0000"/>
-              </a:solidFill>
-              <a:latin typeface="Times New Roman" pitchFamily="18" charset="0"/>
-              <a:cs typeface="Times New Roman" pitchFamily="18" charset="0"/>
-            </a:endParaRPr>
-          </a:p>
-        </p:txBody>
-      </p:sp>
-      <p:sp>
-        <p:nvSpPr>
-          <p:cNvPr id="5127" name="74 Rectángulo"/>
-          <p:cNvSpPr>
-            <a:spLocks noChangeArrowheads="1"/>
-          </p:cNvSpPr>
-          <p:nvPr/>
-        </p:nvSpPr>
-        <p:spPr bwMode="auto">
-          <a:xfrm>
-            <a:off x="6394450" y="11857038"/>
-            <a:ext cx="2951163" cy="603250"/>
-          </a:xfrm>
-          <a:prstGeom prst="rect">
-            <a:avLst/>
-          </a:prstGeom>
-          <a:noFill/>
-          <a:ln>
-            <a:noFill/>
-          </a:ln>
-          <a:extLst>
-            <a:ext uri="{909E8E84-426E-40DD-AFC4-6F175D3DCCD1}">
-              <a14:hiddenFill xmlns:a14="http://schemas.microsoft.com/office/drawing/2010/main">
-                <a:solidFill>
-                  <a:srgbClr val="FFFFFF"/>
-                </a:solidFill>
-              </a14:hiddenFill>
-            </a:ext>
-            <a:ext uri="{91240B29-F687-4F45-9708-019B960494DF}">
-              <a14:hiddenLine xmlns:a14="http://schemas.microsoft.com/office/drawing/2010/main" w="9525">
-                <a:solidFill>
-                  <a:srgbClr val="000000"/>
-                </a:solidFill>
-                <a:miter lim="800000"/>
-                <a:headEnd/>
-                <a:tailEnd/>
-              </a14:hiddenLine>
-            </a:ext>
-          </a:extLst>
-        </p:spPr>
-        <p:txBody>
-          <a:bodyPr lIns="79288" tIns="39644" rIns="79288" bIns="39644">
-            <a:spAutoFit/>
-          </a:bodyPr>
-          <a:lstStyle>
-            <a:lvl1pPr>
-              <a:defRPr sz="2900">
-                <a:solidFill>
-                  <a:schemeClr val="tx1"/>
-                </a:solidFill>
-                <a:latin typeface="Arial" charset="0"/>
-                <a:cs typeface="Arial" charset="0"/>
-              </a:defRPr>
-            </a:lvl1pPr>
-            <a:lvl2pPr marL="742950" indent="-285750">
-              <a:defRPr sz="2900">
-                <a:solidFill>
-                  <a:schemeClr val="tx1"/>
-                </a:solidFill>
-                <a:latin typeface="Arial" charset="0"/>
-                <a:cs typeface="Arial" charset="0"/>
-              </a:defRPr>
-            </a:lvl2pPr>
-            <a:lvl3pPr marL="1143000" indent="-228600">
-              <a:defRPr sz="2900">
-                <a:solidFill>
-                  <a:schemeClr val="tx1"/>
-                </a:solidFill>
-                <a:latin typeface="Arial" charset="0"/>
-                <a:cs typeface="Arial" charset="0"/>
-              </a:defRPr>
-            </a:lvl3pPr>
-            <a:lvl4pPr marL="1600200" indent="-228600">
-              <a:defRPr sz="2900">
-                <a:solidFill>
-                  <a:schemeClr val="tx1"/>
-                </a:solidFill>
-                <a:latin typeface="Arial" charset="0"/>
-                <a:cs typeface="Arial" charset="0"/>
-              </a:defRPr>
-            </a:lvl4pPr>
-            <a:lvl5pPr marL="2057400" indent="-228600">
-              <a:defRPr sz="2900">
-                <a:solidFill>
-                  <a:schemeClr val="tx1"/>
-                </a:solidFill>
-                <a:latin typeface="Arial" charset="0"/>
-                <a:cs typeface="Arial" charset="0"/>
-              </a:defRPr>
-            </a:lvl5pPr>
-            <a:lvl6pPr marL="2514600" indent="-228600" defTabSz="1443038" eaLnBrk="0" fontAlgn="base" hangingPunct="0">
-              <a:spcBef>
-                <a:spcPct val="0"/>
-              </a:spcBef>
-              <a:spcAft>
-                <a:spcPct val="0"/>
-              </a:spcAft>
-              <a:defRPr sz="2900">
-                <a:solidFill>
-                  <a:schemeClr val="tx1"/>
-                </a:solidFill>
-                <a:latin typeface="Arial" charset="0"/>
-                <a:cs typeface="Arial" charset="0"/>
-              </a:defRPr>
-            </a:lvl6pPr>
-            <a:lvl7pPr marL="2971800" indent="-228600" defTabSz="1443038" eaLnBrk="0" fontAlgn="base" hangingPunct="0">
-              <a:spcBef>
-                <a:spcPct val="0"/>
-              </a:spcBef>
-              <a:spcAft>
-                <a:spcPct val="0"/>
-              </a:spcAft>
-              <a:defRPr sz="2900">
-                <a:solidFill>
-                  <a:schemeClr val="tx1"/>
-                </a:solidFill>
-                <a:latin typeface="Arial" charset="0"/>
-                <a:cs typeface="Arial" charset="0"/>
-              </a:defRPr>
-            </a:lvl7pPr>
-            <a:lvl8pPr marL="3429000" indent="-228600" defTabSz="1443038" eaLnBrk="0" fontAlgn="base" hangingPunct="0">
-              <a:spcBef>
-                <a:spcPct val="0"/>
-              </a:spcBef>
-              <a:spcAft>
-                <a:spcPct val="0"/>
-              </a:spcAft>
-              <a:defRPr sz="2900">
-                <a:solidFill>
-                  <a:schemeClr val="tx1"/>
-                </a:solidFill>
-                <a:latin typeface="Arial" charset="0"/>
-                <a:cs typeface="Arial" charset="0"/>
-              </a:defRPr>
-            </a:lvl8pPr>
-            <a:lvl9pPr marL="3886200" indent="-228600" defTabSz="1443038" eaLnBrk="0" fontAlgn="base" hangingPunct="0">
-              <a:spcBef>
-                <a:spcPct val="0"/>
-              </a:spcBef>
-              <a:spcAft>
-                <a:spcPct val="0"/>
-              </a:spcAft>
-              <a:defRPr sz="2900">
-                <a:solidFill>
-                  <a:schemeClr val="tx1"/>
-                </a:solidFill>
-                <a:latin typeface="Arial" charset="0"/>
-                <a:cs typeface="Arial" charset="0"/>
-              </a:defRPr>
-            </a:lvl9pPr>
-          </a:lstStyle>
-          <a:p>
-            <a:pPr eaLnBrk="1" hangingPunct="1"/>
-            <a:r>
-              <a:rPr lang="es-VE" altLang="es-VE" sz="1700" i="1">
-                <a:latin typeface="Times New Roman" pitchFamily="18" charset="0"/>
-                <a:cs typeface="Times New Roman" pitchFamily="18" charset="0"/>
-              </a:rPr>
-              <a:t>Puerto Ordaz, </a:t>
-            </a:r>
-            <a:r>
-              <a:rPr lang="es-ES" altLang="es-VE" sz="1700" i="1">
-                <a:latin typeface="Times New Roman" pitchFamily="18" charset="0"/>
-                <a:cs typeface="Times New Roman" pitchFamily="18" charset="0"/>
-              </a:rPr>
-              <a:t>2</a:t>
-            </a:r>
-            <a:r>
-              <a:rPr lang="es-VE" altLang="ja-JP" sz="1700" i="1">
-                <a:latin typeface="Times New Roman" pitchFamily="18" charset="0"/>
-                <a:cs typeface="Times New Roman" pitchFamily="18" charset="0"/>
-              </a:rPr>
-              <a:t>0</a:t>
-            </a:r>
-            <a:r>
-              <a:rPr lang="es-VE" altLang="es-VE" sz="1700" i="1">
-                <a:latin typeface="Times New Roman" pitchFamily="18" charset="0"/>
-                <a:cs typeface="Times New Roman" pitchFamily="18" charset="0"/>
-              </a:rPr>
-              <a:t>/</a:t>
-            </a:r>
-            <a:r>
-              <a:rPr lang="es-VE" altLang="ja-JP" sz="1700" i="1">
-                <a:latin typeface="Times New Roman" pitchFamily="18" charset="0"/>
-              </a:rPr>
-              <a:t>12</a:t>
-            </a:r>
-            <a:r>
-              <a:rPr lang="es-VE" altLang="es-VE" sz="1700" i="1">
-                <a:latin typeface="Times New Roman" pitchFamily="18" charset="0"/>
-                <a:cs typeface="Times New Roman" pitchFamily="18" charset="0"/>
-              </a:rPr>
-              <a:t>/2025</a:t>
-            </a:r>
-          </a:p>
-          <a:p>
-            <a:pPr eaLnBrk="1" hangingPunct="1"/>
-            <a:r>
-              <a:rPr lang="es-VE" altLang="es-VE" sz="1700" i="1">
-                <a:latin typeface="Times New Roman" pitchFamily="18" charset="0"/>
-                <a:cs typeface="Times New Roman" pitchFamily="18" charset="0"/>
-              </a:rPr>
-              <a:t>Registro N°: </a:t>
-            </a:r>
-            <a:r>
-              <a:rPr lang="es-VE" altLang="es-VE" sz="1700" i="1">
-                <a:solidFill>
-                  <a:srgbClr val="FF0000"/>
-                </a:solidFill>
-                <a:latin typeface="Times New Roman" pitchFamily="18" charset="0"/>
-                <a:cs typeface="Times New Roman" pitchFamily="18" charset="0"/>
-              </a:rPr>
-              <a:t>14</a:t>
-            </a:r>
-            <a:r>
-              <a:rPr lang="es-VE" altLang="ja-JP" sz="1700" i="1">
-                <a:solidFill>
-                  <a:srgbClr val="FF0000"/>
-                </a:solidFill>
-                <a:latin typeface="Times New Roman" pitchFamily="18" charset="0"/>
-              </a:rPr>
-              <a:t>79</a:t>
-            </a:r>
-            <a:endParaRPr lang="es-VE" altLang="es-VE"/>
-          </a:p>
-        </p:txBody>
-      </p:sp>
-      <p:sp>
-        <p:nvSpPr>
           <p:cNvPr id="75" name="74 CuadroTexto"/>
           <p:cNvSpPr txBox="1"/>
           <p:nvPr/>
@@ -2024,173 +1858,6 @@
       </p:sp>
       <p:sp>
         <p:nvSpPr>
-          <p:cNvPr id="5130" name="78 CuadroTexto"/>
-          <p:cNvSpPr txBox="1">
-            <a:spLocks noChangeArrowheads="1"/>
-          </p:cNvSpPr>
-          <p:nvPr/>
-        </p:nvSpPr>
-        <p:spPr bwMode="auto">
-          <a:xfrm>
-            <a:off x="4806950" y="2451100"/>
-            <a:ext cx="960438" cy="4760913"/>
-          </a:xfrm>
-          <a:prstGeom prst="rect">
-            <a:avLst/>
-          </a:prstGeom>
-          <a:noFill/>
-          <a:ln>
-            <a:noFill/>
-          </a:ln>
-          <a:extLst>
-            <a:ext uri="{909E8E84-426E-40DD-AFC4-6F175D3DCCD1}">
-              <a14:hiddenFill xmlns:a14="http://schemas.microsoft.com/office/drawing/2010/main">
-                <a:solidFill>
-                  <a:srgbClr val="FFFFFF"/>
-                </a:solidFill>
-              </a14:hiddenFill>
-            </a:ext>
-            <a:ext uri="{91240B29-F687-4F45-9708-019B960494DF}">
-              <a14:hiddenLine xmlns:a14="http://schemas.microsoft.com/office/drawing/2010/main" w="9525">
-                <a:solidFill>
-                  <a:srgbClr val="000000"/>
-                </a:solidFill>
-                <a:miter lim="800000"/>
-                <a:headEnd/>
-                <a:tailEnd/>
-              </a14:hiddenLine>
-            </a:ext>
-          </a:extLst>
-        </p:spPr>
-        <p:txBody>
-          <a:bodyPr vert="eaVert" lIns="79288" tIns="39644" rIns="79288" bIns="39644">
-            <a:spAutoFit/>
-          </a:bodyPr>
-          <a:lstStyle>
-            <a:lvl1pPr>
-              <a:defRPr sz="2900">
-                <a:solidFill>
-                  <a:schemeClr val="tx1"/>
-                </a:solidFill>
-                <a:latin typeface="Arial" charset="0"/>
-                <a:cs typeface="Arial" charset="0"/>
-              </a:defRPr>
-            </a:lvl1pPr>
-            <a:lvl2pPr marL="742950" indent="-285750">
-              <a:defRPr sz="2900">
-                <a:solidFill>
-                  <a:schemeClr val="tx1"/>
-                </a:solidFill>
-                <a:latin typeface="Arial" charset="0"/>
-                <a:cs typeface="Arial" charset="0"/>
-              </a:defRPr>
-            </a:lvl2pPr>
-            <a:lvl3pPr marL="1143000" indent="-228600">
-              <a:defRPr sz="2900">
-                <a:solidFill>
-                  <a:schemeClr val="tx1"/>
-                </a:solidFill>
-                <a:latin typeface="Arial" charset="0"/>
-                <a:cs typeface="Arial" charset="0"/>
-              </a:defRPr>
-            </a:lvl3pPr>
-            <a:lvl4pPr marL="1600200" indent="-228600">
-              <a:defRPr sz="2900">
-                <a:solidFill>
-                  <a:schemeClr val="tx1"/>
-                </a:solidFill>
-                <a:latin typeface="Arial" charset="0"/>
-                <a:cs typeface="Arial" charset="0"/>
-              </a:defRPr>
-            </a:lvl4pPr>
-            <a:lvl5pPr marL="2057400" indent="-228600">
-              <a:defRPr sz="2900">
-                <a:solidFill>
-                  <a:schemeClr val="tx1"/>
-                </a:solidFill>
-                <a:latin typeface="Arial" charset="0"/>
-                <a:cs typeface="Arial" charset="0"/>
-              </a:defRPr>
-            </a:lvl5pPr>
-            <a:lvl6pPr marL="2514600" indent="-228600" defTabSz="1443038" eaLnBrk="0" fontAlgn="base" hangingPunct="0">
-              <a:spcBef>
-                <a:spcPct val="0"/>
-              </a:spcBef>
-              <a:spcAft>
-                <a:spcPct val="0"/>
-              </a:spcAft>
-              <a:defRPr sz="2900">
-                <a:solidFill>
-                  <a:schemeClr val="tx1"/>
-                </a:solidFill>
-                <a:latin typeface="Arial" charset="0"/>
-                <a:cs typeface="Arial" charset="0"/>
-              </a:defRPr>
-            </a:lvl6pPr>
-            <a:lvl7pPr marL="2971800" indent="-228600" defTabSz="1443038" eaLnBrk="0" fontAlgn="base" hangingPunct="0">
-              <a:spcBef>
-                <a:spcPct val="0"/>
-              </a:spcBef>
-              <a:spcAft>
-                <a:spcPct val="0"/>
-              </a:spcAft>
-              <a:defRPr sz="2900">
-                <a:solidFill>
-                  <a:schemeClr val="tx1"/>
-                </a:solidFill>
-                <a:latin typeface="Arial" charset="0"/>
-                <a:cs typeface="Arial" charset="0"/>
-              </a:defRPr>
-            </a:lvl7pPr>
-            <a:lvl8pPr marL="3429000" indent="-228600" defTabSz="1443038" eaLnBrk="0" fontAlgn="base" hangingPunct="0">
-              <a:spcBef>
-                <a:spcPct val="0"/>
-              </a:spcBef>
-              <a:spcAft>
-                <a:spcPct val="0"/>
-              </a:spcAft>
-              <a:defRPr sz="2900">
-                <a:solidFill>
-                  <a:schemeClr val="tx1"/>
-                </a:solidFill>
-                <a:latin typeface="Arial" charset="0"/>
-                <a:cs typeface="Arial" charset="0"/>
-              </a:defRPr>
-            </a:lvl8pPr>
-            <a:lvl9pPr marL="3886200" indent="-228600" defTabSz="1443038" eaLnBrk="0" fontAlgn="base" hangingPunct="0">
-              <a:spcBef>
-                <a:spcPct val="0"/>
-              </a:spcBef>
-              <a:spcAft>
-                <a:spcPct val="0"/>
-              </a:spcAft>
-              <a:defRPr sz="2900">
-                <a:solidFill>
-                  <a:schemeClr val="tx1"/>
-                </a:solidFill>
-                <a:latin typeface="Arial" charset="0"/>
-                <a:cs typeface="Arial" charset="0"/>
-              </a:defRPr>
-            </a:lvl9pPr>
-          </a:lstStyle>
-          <a:p>
-            <a:pPr eaLnBrk="1" hangingPunct="1"/>
-            <a:r>
-              <a:rPr lang="ja-JP" altLang="es-VE" sz="5200">
-                <a:latin typeface="EPSON 太行書体Ｂ" pitchFamily="65" charset="-128"/>
-                <a:ea typeface="EPSON 太行書体Ｂ" pitchFamily="65" charset="-128"/>
-              </a:rPr>
-              <a:t>三級二允許ス</a:t>
-            </a:r>
-            <a:endParaRPr lang="es-VE" altLang="es-VE" sz="5200">
-              <a:latin typeface="EPSON 太行書体Ｂ" pitchFamily="65" charset="-128"/>
-              <a:ea typeface="EPSON 太行書体Ｂ" pitchFamily="65" charset="-128"/>
-            </a:endParaRPr>
-          </a:p>
-        </p:txBody>
-      </p:sp>
-      <p:sp>
-        <p:nvSpPr>
           <p:cNvPr id="5131" name="80 CuadroTexto"/>
           <p:cNvSpPr txBox="1">
             <a:spLocks noChangeArrowheads="1"/>
@@ -2469,66 +2136,6 @@
             <a:endParaRPr lang="es-VE" sz="3500" dirty="0">
               <a:latin typeface="EPSON 太行書体Ｂ" pitchFamily="65" charset="-128"/>
               <a:ea typeface="EPSON 太行書体Ｂ" pitchFamily="65" charset="-128"/>
-            </a:endParaRPr>
-          </a:p>
-        </p:txBody>
-      </p:sp>
-      <p:sp>
-        <p:nvSpPr>
-          <p:cNvPr id="33" name="32 Rectángulo"/>
-          <p:cNvSpPr/>
-          <p:nvPr/>
-        </p:nvSpPr>
-        <p:spPr>
-          <a:xfrm>
-            <a:off x="8407226" y="2117386"/>
-            <a:ext cx="432048" cy="2062103"/>
-          </a:xfrm>
-          <a:prstGeom prst="rect">
-            <a:avLst/>
-          </a:prstGeom>
-        </p:spPr>
-        <p:txBody>
-          <a:bodyPr>
-            <a:spAutoFit/>
-          </a:bodyPr>
-          <a:lstStyle/>
-          <a:p>
-            <a:pPr algn="ctr" eaLnBrk="1" hangingPunct="1">
-              <a:defRPr/>
-            </a:pPr>
-            <a:r>
-              <a:rPr lang="ja-JP" altLang="es-VE" sz="2000" spc="-300" dirty="0">
-                <a:ln w="6350">
-                  <a:solidFill>
-                    <a:schemeClr val="tx1"/>
-                  </a:solidFill>
-                </a:ln>
-                <a:latin typeface="EPSON 太行書体Ｂ" pitchFamily="65" charset="-128"/>
-                <a:ea typeface="EPSON 太行書体Ｂ" pitchFamily="65" charset="-128"/>
-              </a:rPr>
-              <a:t>第一四七九号</a:t>
-            </a:r>
-            <a:r>
-              <a:rPr lang="ja-JP" altLang="es-VE" sz="2800" dirty="0">
-                <a:ln w="6350">
-                  <a:solidFill>
-                    <a:schemeClr val="tx1"/>
-                  </a:solidFill>
-                </a:ln>
-                <a:latin typeface="Batang" pitchFamily="18" charset="-127"/>
-                <a:ea typeface="イワタ行書" pitchFamily="1" charset="-128"/>
-              </a:rPr>
-              <a:t>　</a:t>
-            </a:r>
-            <a:endParaRPr lang="es-VE" sz="2800" dirty="0">
-              <a:ln w="6350">
-                <a:solidFill>
-                  <a:schemeClr val="tx1"/>
-                </a:solidFill>
-              </a:ln>
-              <a:latin typeface="Batang" pitchFamily="18" charset="-127"/>
-              <a:ea typeface="イワタ行書" pitchFamily="1" charset="-128"/>
             </a:endParaRPr>
           </a:p>
         </p:txBody>
@@ -2646,7 +2253,7 @@
         <p:spPr bwMode="auto">
           <a:xfrm>
             <a:off x="0" y="9112250"/>
-            <a:ext cx="10045700" cy="1041400"/>
+            <a:ext cx="10045700" cy="1188058"/>
           </a:xfrm>
           <a:prstGeom prst="rect">
             <a:avLst/>
@@ -2793,16 +2400,16 @@
               </a:lnSpc>
             </a:pPr>
             <a:r>
-              <a:rPr lang="it-IT" altLang="ja-JP" sz="4800">
+              <a:rPr lang="it-IT" altLang="ja-JP" sz="4800" dirty="0" smtClean="0">
                 <a:solidFill>
                   <a:srgbClr val="FF0000"/>
                 </a:solidFill>
                 <a:latin typeface="Old English Text MT" pitchFamily="66" charset="0"/>
                 <a:cs typeface="Times New Roman" pitchFamily="18" charset="0"/>
               </a:rPr>
-              <a:t>Rubelis D. Ortiz C.</a:t>
-            </a:r>
-            <a:endParaRPr lang="es-VE" altLang="ja-JP" sz="4800">
+              <a:t>{{Nombre_Alumno}}</a:t>
+            </a:r>
+            <a:endParaRPr lang="es-VE" altLang="ja-JP" sz="4800" dirty="0">
               <a:solidFill>
                 <a:srgbClr val="FF0000"/>
               </a:solidFill>
@@ -2822,8 +2429,8 @@
         </p:nvSpPr>
         <p:spPr bwMode="auto">
           <a:xfrm>
-            <a:off x="7127875" y="1584325"/>
-            <a:ext cx="774700" cy="6264275"/>
+            <a:off x="7126897" y="1584325"/>
+            <a:ext cx="775678" cy="6264275"/>
           </a:xfrm>
           <a:prstGeom prst="rect">
             <a:avLst/>
@@ -2966,13 +2573,27 @@
           <a:p>
             <a:pPr algn="ctr" eaLnBrk="1" hangingPunct="1"/>
             <a:r>
-              <a:rPr lang="ja-JP" altLang="es-VE" sz="4000">
+              <a:rPr lang="es-MX" altLang="ja-JP" sz="4000" dirty="0" smtClean="0">
                 <a:latin typeface="EPSON 太行書体Ｂ" pitchFamily="65" charset="-128"/>
                 <a:ea typeface="EPSON 太行書体Ｂ" pitchFamily="65" charset="-128"/>
               </a:rPr>
-              <a:t>オルテズ　ルベリス</a:t>
-            </a:r>
-            <a:endParaRPr lang="es-VE" altLang="ja-JP" sz="4000">
+              <a:t>{{</a:t>
+            </a:r>
+            <a:r>
+              <a:rPr lang="es-MX" altLang="ja-JP" sz="4000" dirty="0" err="1" smtClean="0">
+                <a:latin typeface="EPSON 太行書体Ｂ" pitchFamily="65" charset="-128"/>
+                <a:ea typeface="EPSON 太行書体Ｂ" pitchFamily="65" charset="-128"/>
+              </a:rPr>
+              <a:t>nombre_katakana</a:t>
+            </a:r>
+            <a:r>
+              <a:rPr lang="es-MX" altLang="ja-JP" sz="4000" dirty="0" smtClean="0">
+                <a:latin typeface="EPSON 太行書体Ｂ" pitchFamily="65" charset="-128"/>
+                <a:ea typeface="EPSON 太行書体Ｂ" pitchFamily="65" charset="-128"/>
+              </a:rPr>
+              <a:t>}}</a:t>
+            </a:r>
+            <a:endParaRPr lang="es-VE" altLang="ja-JP" sz="4000" dirty="0">
               <a:latin typeface="EPSON 太行書体Ｂ" pitchFamily="65" charset="-128"/>
               <a:ea typeface="EPSON 太行書体Ｂ" pitchFamily="65" charset="-128"/>
             </a:endParaRPr>
@@ -3764,8 +3385,8 @@
         </p:nvSpPr>
         <p:spPr bwMode="auto">
           <a:xfrm>
-            <a:off x="2965450" y="3240088"/>
-            <a:ext cx="468313" cy="3887787"/>
+            <a:off x="2965656" y="3240088"/>
+            <a:ext cx="467901" cy="3887787"/>
           </a:xfrm>
           <a:prstGeom prst="rect">
             <a:avLst/>
@@ -3908,180 +3529,27 @@
           <a:p>
             <a:pPr eaLnBrk="1" hangingPunct="1"/>
             <a:r>
-              <a:rPr lang="ja-JP" altLang="es-VE" sz="2000">
+              <a:rPr lang="es-MX" altLang="ja-JP" sz="2000" dirty="0" smtClean="0">
                 <a:latin typeface="EPSON 太行書体Ｂ" pitchFamily="65" charset="-128"/>
                 <a:ea typeface="EPSON 太行書体Ｂ" pitchFamily="65" charset="-128"/>
               </a:rPr>
-              <a:t>二〇二五年十二月二十日</a:t>
-            </a:r>
-            <a:endParaRPr lang="es-VE" altLang="es-VE" sz="2000">
-              <a:latin typeface="EPSON 太行書体Ｂ" pitchFamily="65" charset="-128"/>
-              <a:ea typeface="EPSON 太行書体Ｂ" pitchFamily="65" charset="-128"/>
-            </a:endParaRPr>
-          </a:p>
-        </p:txBody>
-      </p:sp>
-      <p:sp>
-        <p:nvSpPr>
-          <p:cNvPr id="5148" name="88 CuadroTexto"/>
-          <p:cNvSpPr txBox="1">
-            <a:spLocks noChangeArrowheads="1"/>
-          </p:cNvSpPr>
-          <p:nvPr/>
-        </p:nvSpPr>
-        <p:spPr bwMode="auto">
-          <a:xfrm>
-            <a:off x="7388225" y="3494088"/>
-            <a:ext cx="530225" cy="827087"/>
-          </a:xfrm>
-          <a:prstGeom prst="rect">
-            <a:avLst/>
-          </a:prstGeom>
-          <a:noFill/>
-          <a:ln>
-            <a:noFill/>
-          </a:ln>
-          <a:extLst>
-            <a:ext uri="{909E8E84-426E-40DD-AFC4-6F175D3DCCD1}">
-              <a14:hiddenFill xmlns:a14="http://schemas.microsoft.com/office/drawing/2010/main">
-                <a:solidFill>
-                  <a:srgbClr val="FFFFFF"/>
-                </a:solidFill>
-              </a14:hiddenFill>
-            </a:ext>
-            <a:ext uri="{91240B29-F687-4F45-9708-019B960494DF}">
-              <a14:hiddenLine xmlns:a14="http://schemas.microsoft.com/office/drawing/2010/main" w="9525">
-                <a:solidFill>
-                  <a:srgbClr val="000000"/>
-                </a:solidFill>
-                <a:miter lim="800000"/>
-                <a:headEnd/>
-                <a:tailEnd/>
-              </a14:hiddenLine>
-            </a:ext>
-          </a:extLst>
-        </p:spPr>
-        <p:txBody>
-          <a:bodyPr vert="eaVert" lIns="79288" tIns="39644" rIns="79288" bIns="39644">
-            <a:spAutoFit/>
-          </a:bodyPr>
-          <a:lstStyle>
-            <a:lvl1pPr>
-              <a:defRPr sz="2900">
-                <a:solidFill>
-                  <a:schemeClr val="tx1"/>
-                </a:solidFill>
-                <a:latin typeface="Arial" charset="0"/>
-                <a:cs typeface="Arial" charset="0"/>
-              </a:defRPr>
-            </a:lvl1pPr>
-            <a:lvl2pPr marL="742950" indent="-285750">
-              <a:defRPr sz="2900">
-                <a:solidFill>
-                  <a:schemeClr val="tx1"/>
-                </a:solidFill>
-                <a:latin typeface="Arial" charset="0"/>
-                <a:cs typeface="Arial" charset="0"/>
-              </a:defRPr>
-            </a:lvl2pPr>
-            <a:lvl3pPr marL="1143000" indent="-228600">
-              <a:defRPr sz="2900">
-                <a:solidFill>
-                  <a:schemeClr val="tx1"/>
-                </a:solidFill>
-                <a:latin typeface="Arial" charset="0"/>
-                <a:cs typeface="Arial" charset="0"/>
-              </a:defRPr>
-            </a:lvl3pPr>
-            <a:lvl4pPr marL="1600200" indent="-228600">
-              <a:defRPr sz="2900">
-                <a:solidFill>
-                  <a:schemeClr val="tx1"/>
-                </a:solidFill>
-                <a:latin typeface="Arial" charset="0"/>
-                <a:cs typeface="Arial" charset="0"/>
-              </a:defRPr>
-            </a:lvl4pPr>
-            <a:lvl5pPr marL="2057400" indent="-228600">
-              <a:defRPr sz="2900">
-                <a:solidFill>
-                  <a:schemeClr val="tx1"/>
-                </a:solidFill>
-                <a:latin typeface="Arial" charset="0"/>
-                <a:cs typeface="Arial" charset="0"/>
-              </a:defRPr>
-            </a:lvl5pPr>
-            <a:lvl6pPr marL="2514600" indent="-228600" defTabSz="1443038" eaLnBrk="0" fontAlgn="base" hangingPunct="0">
-              <a:spcBef>
-                <a:spcPct val="0"/>
-              </a:spcBef>
-              <a:spcAft>
-                <a:spcPct val="0"/>
-              </a:spcAft>
-              <a:defRPr sz="2900">
-                <a:solidFill>
-                  <a:schemeClr val="tx1"/>
-                </a:solidFill>
-                <a:latin typeface="Arial" charset="0"/>
-                <a:cs typeface="Arial" charset="0"/>
-              </a:defRPr>
-            </a:lvl6pPr>
-            <a:lvl7pPr marL="2971800" indent="-228600" defTabSz="1443038" eaLnBrk="0" fontAlgn="base" hangingPunct="0">
-              <a:spcBef>
-                <a:spcPct val="0"/>
-              </a:spcBef>
-              <a:spcAft>
-                <a:spcPct val="0"/>
-              </a:spcAft>
-              <a:defRPr sz="2900">
-                <a:solidFill>
-                  <a:schemeClr val="tx1"/>
-                </a:solidFill>
-                <a:latin typeface="Arial" charset="0"/>
-                <a:cs typeface="Arial" charset="0"/>
-              </a:defRPr>
-            </a:lvl7pPr>
-            <a:lvl8pPr marL="3429000" indent="-228600" defTabSz="1443038" eaLnBrk="0" fontAlgn="base" hangingPunct="0">
-              <a:spcBef>
-                <a:spcPct val="0"/>
-              </a:spcBef>
-              <a:spcAft>
-                <a:spcPct val="0"/>
-              </a:spcAft>
-              <a:defRPr sz="2900">
-                <a:solidFill>
-                  <a:schemeClr val="tx1"/>
-                </a:solidFill>
-                <a:latin typeface="Arial" charset="0"/>
-                <a:cs typeface="Arial" charset="0"/>
-              </a:defRPr>
-            </a:lvl8pPr>
-            <a:lvl9pPr marL="3886200" indent="-228600" defTabSz="1443038" eaLnBrk="0" fontAlgn="base" hangingPunct="0">
-              <a:spcBef>
-                <a:spcPct val="0"/>
-              </a:spcBef>
-              <a:spcAft>
-                <a:spcPct val="0"/>
-              </a:spcAft>
-              <a:defRPr sz="2900">
-                <a:solidFill>
-                  <a:schemeClr val="tx1"/>
-                </a:solidFill>
-                <a:latin typeface="Arial" charset="0"/>
-                <a:cs typeface="Arial" charset="0"/>
-              </a:defRPr>
-            </a:lvl9pPr>
-          </a:lstStyle>
-          <a:p>
-            <a:pPr algn="ctr" eaLnBrk="1" hangingPunct="1"/>
-            <a:r>
-              <a:rPr lang="ja-JP" altLang="es-VE" sz="2400">
+              <a:t>{{</a:t>
+            </a:r>
+            <a:r>
+              <a:rPr lang="es-MX" altLang="ja-JP" sz="2000" dirty="0" err="1" smtClean="0">
                 <a:latin typeface="EPSON 太行書体Ｂ" pitchFamily="65" charset="-128"/>
                 <a:ea typeface="EPSON 太行書体Ｂ" pitchFamily="65" charset="-128"/>
               </a:rPr>
-              <a:t>イ　</a:t>
-            </a:r>
-            <a:endParaRPr lang="es-VE" altLang="ja-JP" sz="2400">
+              <a:t>fecha_japonesa</a:t>
+            </a:r>
+            <a:r>
+              <a:rPr lang="es-MX" altLang="ja-JP" sz="2000" dirty="0" smtClean="0">
+                <a:latin typeface="EPSON 太行書体Ｂ" pitchFamily="65" charset="-128"/>
+                <a:ea typeface="EPSON 太行書体Ｂ" pitchFamily="65" charset="-128"/>
+              </a:rPr>
+              <a:t>}}</a:t>
+            </a:r>
+            <a:endParaRPr lang="es-VE" altLang="es-VE" sz="2000" dirty="0">
               <a:latin typeface="EPSON 太行書体Ｂ" pitchFamily="65" charset="-128"/>
               <a:ea typeface="EPSON 太行書体Ｂ" pitchFamily="65" charset="-128"/>
             </a:endParaRPr>
@@ -4142,6 +3610,1453 @@
           </a:extLst>
         </p:spPr>
       </p:pic>
+      <p:sp>
+        <p:nvSpPr>
+          <p:cNvPr id="36" name="35 Rectángulo"/>
+          <p:cNvSpPr/>
+          <p:nvPr/>
+        </p:nvSpPr>
+        <p:spPr>
+          <a:xfrm>
+            <a:off x="8407400" y="2017319"/>
+            <a:ext cx="432048" cy="523220"/>
+          </a:xfrm>
+          <a:prstGeom prst="rect">
+            <a:avLst/>
+          </a:prstGeom>
+        </p:spPr>
+        <p:txBody>
+          <a:bodyPr>
+            <a:spAutoFit/>
+          </a:bodyPr>
+          <a:lstStyle/>
+          <a:p>
+            <a:pPr algn="ctr" eaLnBrk="1" hangingPunct="1">
+              <a:defRPr/>
+            </a:pPr>
+            <a:r>
+              <a:rPr lang="ja-JP" altLang="es-VE" sz="2000" spc="-300" dirty="0" smtClean="0">
+                <a:ln w="6350">
+                  <a:solidFill>
+                    <a:prstClr val="black"/>
+                  </a:solidFill>
+                </a:ln>
+                <a:solidFill>
+                  <a:prstClr val="black"/>
+                </a:solidFill>
+                <a:latin typeface="EPSON 太行書体Ｂ" pitchFamily="65" charset="-128"/>
+                <a:ea typeface="EPSON 太行書体Ｂ" pitchFamily="65" charset="-128"/>
+              </a:rPr>
+              <a:t>第</a:t>
+            </a:r>
+            <a:r>
+              <a:rPr lang="ja-JP" altLang="es-VE" sz="2800" dirty="0">
+                <a:ln w="6350">
+                  <a:solidFill>
+                    <a:prstClr val="black"/>
+                  </a:solidFill>
+                </a:ln>
+                <a:solidFill>
+                  <a:prstClr val="black"/>
+                </a:solidFill>
+                <a:latin typeface="Batang" pitchFamily="18" charset="-127"/>
+                <a:ea typeface="イワタ行書" pitchFamily="1" charset="-128"/>
+              </a:rPr>
+              <a:t>　</a:t>
+            </a:r>
+            <a:endParaRPr lang="es-VE" sz="2800" dirty="0">
+              <a:ln w="6350">
+                <a:solidFill>
+                  <a:prstClr val="black"/>
+                </a:solidFill>
+              </a:ln>
+              <a:solidFill>
+                <a:prstClr val="black"/>
+              </a:solidFill>
+              <a:latin typeface="Batang" pitchFamily="18" charset="-127"/>
+              <a:ea typeface="イワタ行書" pitchFamily="1" charset="-128"/>
+            </a:endParaRPr>
+          </a:p>
+        </p:txBody>
+      </p:sp>
+      <p:sp>
+        <p:nvSpPr>
+          <p:cNvPr id="38" name="37 Rectángulo"/>
+          <p:cNvSpPr/>
+          <p:nvPr/>
+        </p:nvSpPr>
+        <p:spPr>
+          <a:xfrm>
+            <a:off x="8407400" y="3644288"/>
+            <a:ext cx="432048" cy="523220"/>
+          </a:xfrm>
+          <a:prstGeom prst="rect">
+            <a:avLst/>
+          </a:prstGeom>
+        </p:spPr>
+        <p:txBody>
+          <a:bodyPr>
+            <a:spAutoFit/>
+          </a:bodyPr>
+          <a:lstStyle/>
+          <a:p>
+            <a:pPr algn="ctr" eaLnBrk="1" hangingPunct="1">
+              <a:defRPr/>
+            </a:pPr>
+            <a:r>
+              <a:rPr lang="ja-JP" altLang="es-VE" sz="2000" spc="-300" dirty="0" smtClean="0">
+                <a:ln w="6350">
+                  <a:solidFill>
+                    <a:prstClr val="black"/>
+                  </a:solidFill>
+                </a:ln>
+                <a:solidFill>
+                  <a:prstClr val="black"/>
+                </a:solidFill>
+                <a:latin typeface="EPSON 太行書体Ｂ" pitchFamily="65" charset="-128"/>
+                <a:ea typeface="EPSON 太行書体Ｂ" pitchFamily="65" charset="-128"/>
+              </a:rPr>
+              <a:t>号</a:t>
+            </a:r>
+            <a:r>
+              <a:rPr lang="ja-JP" altLang="es-VE" sz="2800" dirty="0">
+                <a:ln w="6350">
+                  <a:solidFill>
+                    <a:prstClr val="black"/>
+                  </a:solidFill>
+                </a:ln>
+                <a:solidFill>
+                  <a:prstClr val="black"/>
+                </a:solidFill>
+                <a:latin typeface="Batang" pitchFamily="18" charset="-127"/>
+                <a:ea typeface="イワタ行書" pitchFamily="1" charset="-128"/>
+              </a:rPr>
+              <a:t>　</a:t>
+            </a:r>
+            <a:endParaRPr lang="es-VE" sz="2800" dirty="0">
+              <a:ln w="6350">
+                <a:solidFill>
+                  <a:prstClr val="black"/>
+                </a:solidFill>
+              </a:ln>
+              <a:solidFill>
+                <a:prstClr val="black"/>
+              </a:solidFill>
+              <a:latin typeface="Batang" pitchFamily="18" charset="-127"/>
+              <a:ea typeface="イワタ行書" pitchFamily="1" charset="-128"/>
+            </a:endParaRPr>
+          </a:p>
+        </p:txBody>
+      </p:sp>
+      <p:sp>
+        <p:nvSpPr>
+          <p:cNvPr id="40" name="78 CuadroTexto"/>
+          <p:cNvSpPr txBox="1">
+            <a:spLocks noChangeArrowheads="1"/>
+          </p:cNvSpPr>
+          <p:nvPr/>
+        </p:nvSpPr>
+        <p:spPr bwMode="auto">
+          <a:xfrm>
+            <a:off x="4807124" y="2376562"/>
+            <a:ext cx="991121" cy="1799804"/>
+          </a:xfrm>
+          <a:prstGeom prst="rect">
+            <a:avLst/>
+          </a:prstGeom>
+          <a:noFill/>
+          <a:ln>
+            <a:noFill/>
+          </a:ln>
+          <a:extLst>
+            <a:ext uri="{909E8E84-426E-40DD-AFC4-6F175D3DCCD1}">
+              <a14:hiddenFill xmlns:a14="http://schemas.microsoft.com/office/drawing/2010/main">
+                <a:solidFill>
+                  <a:srgbClr val="FFFFFF"/>
+                </a:solidFill>
+              </a14:hiddenFill>
+            </a:ext>
+            <a:ext uri="{91240B29-F687-4F45-9708-019B960494DF}">
+              <a14:hiddenLine xmlns:a14="http://schemas.microsoft.com/office/drawing/2010/main" w="9525">
+                <a:solidFill>
+                  <a:srgbClr val="000000"/>
+                </a:solidFill>
+                <a:miter lim="800000"/>
+                <a:headEnd/>
+                <a:tailEnd/>
+              </a14:hiddenLine>
+            </a:ext>
+          </a:extLst>
+        </p:spPr>
+        <p:txBody>
+          <a:bodyPr vert="eaVert" wrap="square" lIns="79288" tIns="39644" rIns="79288" bIns="39644">
+            <a:spAutoFit/>
+          </a:bodyPr>
+          <a:lstStyle>
+            <a:lvl1pPr>
+              <a:defRPr sz="2900">
+                <a:solidFill>
+                  <a:schemeClr val="tx1"/>
+                </a:solidFill>
+                <a:latin typeface="Arial" charset="0"/>
+                <a:cs typeface="Arial" charset="0"/>
+              </a:defRPr>
+            </a:lvl1pPr>
+            <a:lvl2pPr marL="742950" indent="-285750">
+              <a:defRPr sz="2900">
+                <a:solidFill>
+                  <a:schemeClr val="tx1"/>
+                </a:solidFill>
+                <a:latin typeface="Arial" charset="0"/>
+                <a:cs typeface="Arial" charset="0"/>
+              </a:defRPr>
+            </a:lvl2pPr>
+            <a:lvl3pPr marL="1143000" indent="-228600">
+              <a:defRPr sz="2900">
+                <a:solidFill>
+                  <a:schemeClr val="tx1"/>
+                </a:solidFill>
+                <a:latin typeface="Arial" charset="0"/>
+                <a:cs typeface="Arial" charset="0"/>
+              </a:defRPr>
+            </a:lvl3pPr>
+            <a:lvl4pPr marL="1600200" indent="-228600">
+              <a:defRPr sz="2900">
+                <a:solidFill>
+                  <a:schemeClr val="tx1"/>
+                </a:solidFill>
+                <a:latin typeface="Arial" charset="0"/>
+                <a:cs typeface="Arial" charset="0"/>
+              </a:defRPr>
+            </a:lvl4pPr>
+            <a:lvl5pPr marL="2057400" indent="-228600">
+              <a:defRPr sz="2900">
+                <a:solidFill>
+                  <a:schemeClr val="tx1"/>
+                </a:solidFill>
+                <a:latin typeface="Arial" charset="0"/>
+                <a:cs typeface="Arial" charset="0"/>
+              </a:defRPr>
+            </a:lvl5pPr>
+            <a:lvl6pPr marL="2514600" indent="-228600" defTabSz="1443038" eaLnBrk="0" fontAlgn="base" hangingPunct="0">
+              <a:spcBef>
+                <a:spcPct val="0"/>
+              </a:spcBef>
+              <a:spcAft>
+                <a:spcPct val="0"/>
+              </a:spcAft>
+              <a:defRPr sz="2900">
+                <a:solidFill>
+                  <a:schemeClr val="tx1"/>
+                </a:solidFill>
+                <a:latin typeface="Arial" charset="0"/>
+                <a:cs typeface="Arial" charset="0"/>
+              </a:defRPr>
+            </a:lvl6pPr>
+            <a:lvl7pPr marL="2971800" indent="-228600" defTabSz="1443038" eaLnBrk="0" fontAlgn="base" hangingPunct="0">
+              <a:spcBef>
+                <a:spcPct val="0"/>
+              </a:spcBef>
+              <a:spcAft>
+                <a:spcPct val="0"/>
+              </a:spcAft>
+              <a:defRPr sz="2900">
+                <a:solidFill>
+                  <a:schemeClr val="tx1"/>
+                </a:solidFill>
+                <a:latin typeface="Arial" charset="0"/>
+                <a:cs typeface="Arial" charset="0"/>
+              </a:defRPr>
+            </a:lvl7pPr>
+            <a:lvl8pPr marL="3429000" indent="-228600" defTabSz="1443038" eaLnBrk="0" fontAlgn="base" hangingPunct="0">
+              <a:spcBef>
+                <a:spcPct val="0"/>
+              </a:spcBef>
+              <a:spcAft>
+                <a:spcPct val="0"/>
+              </a:spcAft>
+              <a:defRPr sz="2900">
+                <a:solidFill>
+                  <a:schemeClr val="tx1"/>
+                </a:solidFill>
+                <a:latin typeface="Arial" charset="0"/>
+                <a:cs typeface="Arial" charset="0"/>
+              </a:defRPr>
+            </a:lvl8pPr>
+            <a:lvl9pPr marL="3886200" indent="-228600" defTabSz="1443038" eaLnBrk="0" fontAlgn="base" hangingPunct="0">
+              <a:spcBef>
+                <a:spcPct val="0"/>
+              </a:spcBef>
+              <a:spcAft>
+                <a:spcPct val="0"/>
+              </a:spcAft>
+              <a:defRPr sz="2900">
+                <a:solidFill>
+                  <a:schemeClr val="tx1"/>
+                </a:solidFill>
+                <a:latin typeface="Arial" charset="0"/>
+                <a:cs typeface="Arial" charset="0"/>
+              </a:defRPr>
+            </a:lvl9pPr>
+          </a:lstStyle>
+          <a:p>
+            <a:pPr eaLnBrk="1" hangingPunct="1"/>
+            <a:r>
+              <a:rPr lang="es-MX" altLang="es-VE" sz="5400" dirty="0" smtClean="0">
+                <a:solidFill>
+                  <a:srgbClr val="000000"/>
+                </a:solidFill>
+                <a:latin typeface="EPSON 太行書体Ｂ" pitchFamily="65" charset="-128"/>
+                <a:ea typeface="EPSON 太行書体Ｂ" pitchFamily="65" charset="-128"/>
+              </a:rPr>
+              <a:t>{k}</a:t>
+            </a:r>
+            <a:endParaRPr lang="es-VE" altLang="es-VE" sz="5400" dirty="0">
+              <a:solidFill>
+                <a:srgbClr val="000000"/>
+              </a:solidFill>
+              <a:latin typeface="EPSON 太行書体Ｂ" pitchFamily="65" charset="-128"/>
+              <a:ea typeface="EPSON 太行書体Ｂ" pitchFamily="65" charset="-128"/>
+            </a:endParaRPr>
+          </a:p>
+        </p:txBody>
+      </p:sp>
+      <p:sp>
+        <p:nvSpPr>
+          <p:cNvPr id="45" name="20 CuadroTexto"/>
+          <p:cNvSpPr txBox="1">
+            <a:spLocks noChangeArrowheads="1"/>
+          </p:cNvSpPr>
+          <p:nvPr/>
+        </p:nvSpPr>
+        <p:spPr bwMode="auto">
+          <a:xfrm>
+            <a:off x="1077913" y="10201275"/>
+            <a:ext cx="7977187" cy="1188058"/>
+          </a:xfrm>
+          <a:prstGeom prst="rect">
+            <a:avLst/>
+          </a:prstGeom>
+          <a:noFill/>
+          <a:ln>
+            <a:noFill/>
+          </a:ln>
+          <a:extLst>
+            <a:ext uri="{909E8E84-426E-40DD-AFC4-6F175D3DCCD1}">
+              <a14:hiddenFill xmlns:a14="http://schemas.microsoft.com/office/drawing/2010/main">
+                <a:solidFill>
+                  <a:srgbClr val="FFFFFF"/>
+                </a:solidFill>
+              </a14:hiddenFill>
+            </a:ext>
+            <a:ext uri="{91240B29-F687-4F45-9708-019B960494DF}">
+              <a14:hiddenLine xmlns:a14="http://schemas.microsoft.com/office/drawing/2010/main" w="9525">
+                <a:solidFill>
+                  <a:srgbClr val="000000"/>
+                </a:solidFill>
+                <a:miter lim="800000"/>
+                <a:headEnd/>
+                <a:tailEnd/>
+              </a14:hiddenLine>
+            </a:ext>
+          </a:extLst>
+        </p:spPr>
+        <p:txBody>
+          <a:bodyPr lIns="79288" tIns="39644" rIns="79288" bIns="39644">
+            <a:spAutoFit/>
+          </a:bodyPr>
+          <a:lstStyle>
+            <a:lvl1pPr>
+              <a:defRPr sz="2900">
+                <a:solidFill>
+                  <a:schemeClr val="tx1"/>
+                </a:solidFill>
+                <a:latin typeface="Arial" charset="0"/>
+                <a:cs typeface="Arial" charset="0"/>
+              </a:defRPr>
+            </a:lvl1pPr>
+            <a:lvl2pPr marL="742950" indent="-285750">
+              <a:defRPr sz="2900">
+                <a:solidFill>
+                  <a:schemeClr val="tx1"/>
+                </a:solidFill>
+                <a:latin typeface="Arial" charset="0"/>
+                <a:cs typeface="Arial" charset="0"/>
+              </a:defRPr>
+            </a:lvl2pPr>
+            <a:lvl3pPr marL="1143000" indent="-228600">
+              <a:defRPr sz="2900">
+                <a:solidFill>
+                  <a:schemeClr val="tx1"/>
+                </a:solidFill>
+                <a:latin typeface="Arial" charset="0"/>
+                <a:cs typeface="Arial" charset="0"/>
+              </a:defRPr>
+            </a:lvl3pPr>
+            <a:lvl4pPr marL="1600200" indent="-228600">
+              <a:defRPr sz="2900">
+                <a:solidFill>
+                  <a:schemeClr val="tx1"/>
+                </a:solidFill>
+                <a:latin typeface="Arial" charset="0"/>
+                <a:cs typeface="Arial" charset="0"/>
+              </a:defRPr>
+            </a:lvl4pPr>
+            <a:lvl5pPr marL="2057400" indent="-228600">
+              <a:defRPr sz="2900">
+                <a:solidFill>
+                  <a:schemeClr val="tx1"/>
+                </a:solidFill>
+                <a:latin typeface="Arial" charset="0"/>
+                <a:cs typeface="Arial" charset="0"/>
+              </a:defRPr>
+            </a:lvl5pPr>
+            <a:lvl6pPr marL="2514600" indent="-228600" defTabSz="1443038" eaLnBrk="0" fontAlgn="base" hangingPunct="0">
+              <a:spcBef>
+                <a:spcPct val="0"/>
+              </a:spcBef>
+              <a:spcAft>
+                <a:spcPct val="0"/>
+              </a:spcAft>
+              <a:defRPr sz="2900">
+                <a:solidFill>
+                  <a:schemeClr val="tx1"/>
+                </a:solidFill>
+                <a:latin typeface="Arial" charset="0"/>
+                <a:cs typeface="Arial" charset="0"/>
+              </a:defRPr>
+            </a:lvl6pPr>
+            <a:lvl7pPr marL="2971800" indent="-228600" defTabSz="1443038" eaLnBrk="0" fontAlgn="base" hangingPunct="0">
+              <a:spcBef>
+                <a:spcPct val="0"/>
+              </a:spcBef>
+              <a:spcAft>
+                <a:spcPct val="0"/>
+              </a:spcAft>
+              <a:defRPr sz="2900">
+                <a:solidFill>
+                  <a:schemeClr val="tx1"/>
+                </a:solidFill>
+                <a:latin typeface="Arial" charset="0"/>
+                <a:cs typeface="Arial" charset="0"/>
+              </a:defRPr>
+            </a:lvl7pPr>
+            <a:lvl8pPr marL="3429000" indent="-228600" defTabSz="1443038" eaLnBrk="0" fontAlgn="base" hangingPunct="0">
+              <a:spcBef>
+                <a:spcPct val="0"/>
+              </a:spcBef>
+              <a:spcAft>
+                <a:spcPct val="0"/>
+              </a:spcAft>
+              <a:defRPr sz="2900">
+                <a:solidFill>
+                  <a:schemeClr val="tx1"/>
+                </a:solidFill>
+                <a:latin typeface="Arial" charset="0"/>
+                <a:cs typeface="Arial" charset="0"/>
+              </a:defRPr>
+            </a:lvl8pPr>
+            <a:lvl9pPr marL="3886200" indent="-228600" defTabSz="1443038" eaLnBrk="0" fontAlgn="base" hangingPunct="0">
+              <a:spcBef>
+                <a:spcPct val="0"/>
+              </a:spcBef>
+              <a:spcAft>
+                <a:spcPct val="0"/>
+              </a:spcAft>
+              <a:defRPr sz="2900">
+                <a:solidFill>
+                  <a:schemeClr val="tx1"/>
+                </a:solidFill>
+                <a:latin typeface="Arial" charset="0"/>
+                <a:cs typeface="Arial" charset="0"/>
+              </a:defRPr>
+            </a:lvl9pPr>
+          </a:lstStyle>
+          <a:p>
+            <a:pPr algn="ctr" eaLnBrk="1" hangingPunct="1"/>
+            <a:r>
+              <a:rPr lang="es-VE" altLang="es-VE" sz="2400" i="1" dirty="0">
+                <a:latin typeface="Times New Roman" pitchFamily="18" charset="0"/>
+                <a:cs typeface="Times New Roman" pitchFamily="18" charset="0"/>
+              </a:rPr>
+              <a:t>Ha presentado satisfactoriamente su examen reglamentario, demostrando gran aplicación en el aprendizaje del                   </a:t>
+            </a:r>
+            <a:r>
+              <a:rPr lang="es-VE" altLang="es-VE" sz="2400" b="1" i="1" dirty="0">
+                <a:latin typeface="Times New Roman" pitchFamily="18" charset="0"/>
+                <a:cs typeface="Times New Roman" pitchFamily="18" charset="0"/>
+              </a:rPr>
+              <a:t>Karate - Do </a:t>
+            </a:r>
+            <a:r>
+              <a:rPr lang="es-VE" altLang="es-VE" sz="2400" i="1" dirty="0">
+                <a:latin typeface="Times New Roman" pitchFamily="18" charset="0"/>
+                <a:cs typeface="Times New Roman" pitchFamily="18" charset="0"/>
+              </a:rPr>
+              <a:t>estilo </a:t>
+            </a:r>
+            <a:r>
+              <a:rPr lang="es-VE" altLang="es-VE" sz="2400" b="1" i="1" dirty="0">
+                <a:latin typeface="Times New Roman" pitchFamily="18" charset="0"/>
+                <a:cs typeface="Times New Roman" pitchFamily="18" charset="0"/>
+              </a:rPr>
+              <a:t>Okinawa </a:t>
+            </a:r>
+            <a:r>
+              <a:rPr lang="es-VE" altLang="es-VE" sz="2400" b="1" i="1" dirty="0" err="1">
+                <a:latin typeface="Times New Roman" pitchFamily="18" charset="0"/>
+                <a:cs typeface="Times New Roman" pitchFamily="18" charset="0"/>
+              </a:rPr>
+              <a:t>Gojyu</a:t>
+            </a:r>
+            <a:r>
+              <a:rPr lang="es-VE" altLang="es-VE" sz="2400" b="1" i="1" dirty="0">
+                <a:latin typeface="Times New Roman" pitchFamily="18" charset="0"/>
+                <a:cs typeface="Times New Roman" pitchFamily="18" charset="0"/>
+              </a:rPr>
+              <a:t> - </a:t>
+            </a:r>
+            <a:r>
+              <a:rPr lang="es-VE" altLang="es-VE" sz="2400" b="1" i="1" dirty="0" err="1">
+                <a:latin typeface="Times New Roman" pitchFamily="18" charset="0"/>
+                <a:cs typeface="Times New Roman" pitchFamily="18" charset="0"/>
+              </a:rPr>
+              <a:t>Ryu</a:t>
+            </a:r>
+            <a:r>
+              <a:rPr lang="es-VE" altLang="es-VE" sz="2400" b="1" i="1" dirty="0">
+                <a:latin typeface="Times New Roman" pitchFamily="18" charset="0"/>
+                <a:cs typeface="Times New Roman" pitchFamily="18" charset="0"/>
+              </a:rPr>
+              <a:t> </a:t>
+            </a:r>
+            <a:r>
+              <a:rPr lang="es-VE" altLang="es-VE" sz="2400" i="1" dirty="0">
+                <a:latin typeface="Times New Roman" pitchFamily="18" charset="0"/>
+                <a:cs typeface="Times New Roman" pitchFamily="18" charset="0"/>
+              </a:rPr>
+              <a:t>y en Virtud de </a:t>
+            </a:r>
+            <a:r>
+              <a:rPr lang="es-VE" altLang="es-VE" sz="2400" i="1" dirty="0" smtClean="0">
+                <a:latin typeface="Times New Roman" pitchFamily="18" charset="0"/>
+                <a:cs typeface="Times New Roman" pitchFamily="18" charset="0"/>
+              </a:rPr>
+              <a:t>su</a:t>
+            </a:r>
+            <a:endParaRPr lang="es-VE" altLang="es-VE" sz="2400" i="1" dirty="0">
+              <a:solidFill>
+                <a:srgbClr val="FF0000"/>
+              </a:solidFill>
+              <a:latin typeface="Times New Roman" pitchFamily="18" charset="0"/>
+              <a:cs typeface="Times New Roman" pitchFamily="18" charset="0"/>
+            </a:endParaRPr>
+          </a:p>
+        </p:txBody>
+      </p:sp>
+      <p:sp>
+        <p:nvSpPr>
+          <p:cNvPr id="47" name="20 CuadroTexto"/>
+          <p:cNvSpPr txBox="1">
+            <a:spLocks noChangeArrowheads="1"/>
+          </p:cNvSpPr>
+          <p:nvPr/>
+        </p:nvSpPr>
+        <p:spPr bwMode="auto">
+          <a:xfrm>
+            <a:off x="5554266" y="11288208"/>
+            <a:ext cx="3921917" cy="449394"/>
+          </a:xfrm>
+          <a:prstGeom prst="rect">
+            <a:avLst/>
+          </a:prstGeom>
+          <a:noFill/>
+          <a:ln>
+            <a:noFill/>
+          </a:ln>
+          <a:extLst>
+            <a:ext uri="{909E8E84-426E-40DD-AFC4-6F175D3DCCD1}">
+              <a14:hiddenFill xmlns:a14="http://schemas.microsoft.com/office/drawing/2010/main">
+                <a:solidFill>
+                  <a:srgbClr val="FFFFFF"/>
+                </a:solidFill>
+              </a14:hiddenFill>
+            </a:ext>
+            <a:ext uri="{91240B29-F687-4F45-9708-019B960494DF}">
+              <a14:hiddenLine xmlns:a14="http://schemas.microsoft.com/office/drawing/2010/main" w="9525">
+                <a:solidFill>
+                  <a:srgbClr val="000000"/>
+                </a:solidFill>
+                <a:miter lim="800000"/>
+                <a:headEnd/>
+                <a:tailEnd/>
+              </a14:hiddenLine>
+            </a:ext>
+          </a:extLst>
+        </p:spPr>
+        <p:txBody>
+          <a:bodyPr wrap="square" lIns="79288" tIns="39644" rIns="79288" bIns="39644">
+            <a:spAutoFit/>
+          </a:bodyPr>
+          <a:lstStyle>
+            <a:lvl1pPr>
+              <a:defRPr sz="2900">
+                <a:solidFill>
+                  <a:schemeClr val="tx1"/>
+                </a:solidFill>
+                <a:latin typeface="Arial" charset="0"/>
+                <a:cs typeface="Arial" charset="0"/>
+              </a:defRPr>
+            </a:lvl1pPr>
+            <a:lvl2pPr marL="742950" indent="-285750">
+              <a:defRPr sz="2900">
+                <a:solidFill>
+                  <a:schemeClr val="tx1"/>
+                </a:solidFill>
+                <a:latin typeface="Arial" charset="0"/>
+                <a:cs typeface="Arial" charset="0"/>
+              </a:defRPr>
+            </a:lvl2pPr>
+            <a:lvl3pPr marL="1143000" indent="-228600">
+              <a:defRPr sz="2900">
+                <a:solidFill>
+                  <a:schemeClr val="tx1"/>
+                </a:solidFill>
+                <a:latin typeface="Arial" charset="0"/>
+                <a:cs typeface="Arial" charset="0"/>
+              </a:defRPr>
+            </a:lvl3pPr>
+            <a:lvl4pPr marL="1600200" indent="-228600">
+              <a:defRPr sz="2900">
+                <a:solidFill>
+                  <a:schemeClr val="tx1"/>
+                </a:solidFill>
+                <a:latin typeface="Arial" charset="0"/>
+                <a:cs typeface="Arial" charset="0"/>
+              </a:defRPr>
+            </a:lvl4pPr>
+            <a:lvl5pPr marL="2057400" indent="-228600">
+              <a:defRPr sz="2900">
+                <a:solidFill>
+                  <a:schemeClr val="tx1"/>
+                </a:solidFill>
+                <a:latin typeface="Arial" charset="0"/>
+                <a:cs typeface="Arial" charset="0"/>
+              </a:defRPr>
+            </a:lvl5pPr>
+            <a:lvl6pPr marL="2514600" indent="-228600" defTabSz="1443038" eaLnBrk="0" fontAlgn="base" hangingPunct="0">
+              <a:spcBef>
+                <a:spcPct val="0"/>
+              </a:spcBef>
+              <a:spcAft>
+                <a:spcPct val="0"/>
+              </a:spcAft>
+              <a:defRPr sz="2900">
+                <a:solidFill>
+                  <a:schemeClr val="tx1"/>
+                </a:solidFill>
+                <a:latin typeface="Arial" charset="0"/>
+                <a:cs typeface="Arial" charset="0"/>
+              </a:defRPr>
+            </a:lvl6pPr>
+            <a:lvl7pPr marL="2971800" indent="-228600" defTabSz="1443038" eaLnBrk="0" fontAlgn="base" hangingPunct="0">
+              <a:spcBef>
+                <a:spcPct val="0"/>
+              </a:spcBef>
+              <a:spcAft>
+                <a:spcPct val="0"/>
+              </a:spcAft>
+              <a:defRPr sz="2900">
+                <a:solidFill>
+                  <a:schemeClr val="tx1"/>
+                </a:solidFill>
+                <a:latin typeface="Arial" charset="0"/>
+                <a:cs typeface="Arial" charset="0"/>
+              </a:defRPr>
+            </a:lvl7pPr>
+            <a:lvl8pPr marL="3429000" indent="-228600" defTabSz="1443038" eaLnBrk="0" fontAlgn="base" hangingPunct="0">
+              <a:spcBef>
+                <a:spcPct val="0"/>
+              </a:spcBef>
+              <a:spcAft>
+                <a:spcPct val="0"/>
+              </a:spcAft>
+              <a:defRPr sz="2900">
+                <a:solidFill>
+                  <a:schemeClr val="tx1"/>
+                </a:solidFill>
+                <a:latin typeface="Arial" charset="0"/>
+                <a:cs typeface="Arial" charset="0"/>
+              </a:defRPr>
+            </a:lvl8pPr>
+            <a:lvl9pPr marL="3886200" indent="-228600" defTabSz="1443038" eaLnBrk="0" fontAlgn="base" hangingPunct="0">
+              <a:spcBef>
+                <a:spcPct val="0"/>
+              </a:spcBef>
+              <a:spcAft>
+                <a:spcPct val="0"/>
+              </a:spcAft>
+              <a:defRPr sz="2900">
+                <a:solidFill>
+                  <a:schemeClr val="tx1"/>
+                </a:solidFill>
+                <a:latin typeface="Arial" charset="0"/>
+                <a:cs typeface="Arial" charset="0"/>
+              </a:defRPr>
+            </a:lvl9pPr>
+          </a:lstStyle>
+          <a:p>
+            <a:pPr eaLnBrk="1" hangingPunct="1"/>
+            <a:r>
+              <a:rPr lang="es-VE" altLang="es-VE" sz="2400" b="1" i="1" dirty="0" smtClean="0">
+                <a:solidFill>
+                  <a:srgbClr val="FF0000"/>
+                </a:solidFill>
+                <a:latin typeface="Times New Roman" pitchFamily="18" charset="0"/>
+                <a:cs typeface="Times New Roman" pitchFamily="18" charset="0"/>
+              </a:rPr>
+              <a:t>{{</a:t>
+            </a:r>
+            <a:r>
+              <a:rPr lang="es-VE" altLang="es-VE" sz="2400" b="1" i="1" dirty="0" err="1" smtClean="0">
+                <a:solidFill>
+                  <a:srgbClr val="FF0000"/>
+                </a:solidFill>
+                <a:latin typeface="Times New Roman" pitchFamily="18" charset="0"/>
+                <a:cs typeface="Times New Roman" pitchFamily="18" charset="0"/>
+              </a:rPr>
+              <a:t>grado_español</a:t>
+            </a:r>
+            <a:r>
+              <a:rPr lang="es-VE" altLang="es-VE" sz="2400" b="1" i="1" dirty="0" smtClean="0">
+                <a:solidFill>
+                  <a:srgbClr val="FF0000"/>
+                </a:solidFill>
+                <a:latin typeface="Times New Roman" pitchFamily="18" charset="0"/>
+                <a:cs typeface="Times New Roman" pitchFamily="18" charset="0"/>
+              </a:rPr>
+              <a:t>}}</a:t>
+            </a:r>
+            <a:endParaRPr lang="es-VE" altLang="es-VE" sz="2400" i="1" dirty="0">
+              <a:solidFill>
+                <a:srgbClr val="FF0000"/>
+              </a:solidFill>
+              <a:latin typeface="Times New Roman" pitchFamily="18" charset="0"/>
+              <a:cs typeface="Times New Roman" pitchFamily="18" charset="0"/>
+            </a:endParaRPr>
+          </a:p>
+        </p:txBody>
+      </p:sp>
+      <p:sp>
+        <p:nvSpPr>
+          <p:cNvPr id="48" name="20 CuadroTexto"/>
+          <p:cNvSpPr txBox="1">
+            <a:spLocks noChangeArrowheads="1"/>
+          </p:cNvSpPr>
+          <p:nvPr/>
+        </p:nvSpPr>
+        <p:spPr bwMode="auto">
+          <a:xfrm>
+            <a:off x="869579" y="11288208"/>
+            <a:ext cx="5240709" cy="449394"/>
+          </a:xfrm>
+          <a:prstGeom prst="rect">
+            <a:avLst/>
+          </a:prstGeom>
+          <a:noFill/>
+          <a:ln>
+            <a:noFill/>
+          </a:ln>
+          <a:extLst>
+            <a:ext uri="{909E8E84-426E-40DD-AFC4-6F175D3DCCD1}">
+              <a14:hiddenFill xmlns:a14="http://schemas.microsoft.com/office/drawing/2010/main">
+                <a:solidFill>
+                  <a:srgbClr val="FFFFFF"/>
+                </a:solidFill>
+              </a14:hiddenFill>
+            </a:ext>
+            <a:ext uri="{91240B29-F687-4F45-9708-019B960494DF}">
+              <a14:hiddenLine xmlns:a14="http://schemas.microsoft.com/office/drawing/2010/main" w="9525">
+                <a:solidFill>
+                  <a:srgbClr val="000000"/>
+                </a:solidFill>
+                <a:miter lim="800000"/>
+                <a:headEnd/>
+                <a:tailEnd/>
+              </a14:hiddenLine>
+            </a:ext>
+          </a:extLst>
+        </p:spPr>
+        <p:txBody>
+          <a:bodyPr wrap="square" lIns="79288" tIns="39644" rIns="79288" bIns="39644">
+            <a:spAutoFit/>
+          </a:bodyPr>
+          <a:lstStyle>
+            <a:lvl1pPr>
+              <a:defRPr sz="2900">
+                <a:solidFill>
+                  <a:schemeClr val="tx1"/>
+                </a:solidFill>
+                <a:latin typeface="Arial" charset="0"/>
+                <a:cs typeface="Arial" charset="0"/>
+              </a:defRPr>
+            </a:lvl1pPr>
+            <a:lvl2pPr marL="742950" indent="-285750">
+              <a:defRPr sz="2900">
+                <a:solidFill>
+                  <a:schemeClr val="tx1"/>
+                </a:solidFill>
+                <a:latin typeface="Arial" charset="0"/>
+                <a:cs typeface="Arial" charset="0"/>
+              </a:defRPr>
+            </a:lvl2pPr>
+            <a:lvl3pPr marL="1143000" indent="-228600">
+              <a:defRPr sz="2900">
+                <a:solidFill>
+                  <a:schemeClr val="tx1"/>
+                </a:solidFill>
+                <a:latin typeface="Arial" charset="0"/>
+                <a:cs typeface="Arial" charset="0"/>
+              </a:defRPr>
+            </a:lvl3pPr>
+            <a:lvl4pPr marL="1600200" indent="-228600">
+              <a:defRPr sz="2900">
+                <a:solidFill>
+                  <a:schemeClr val="tx1"/>
+                </a:solidFill>
+                <a:latin typeface="Arial" charset="0"/>
+                <a:cs typeface="Arial" charset="0"/>
+              </a:defRPr>
+            </a:lvl4pPr>
+            <a:lvl5pPr marL="2057400" indent="-228600">
+              <a:defRPr sz="2900">
+                <a:solidFill>
+                  <a:schemeClr val="tx1"/>
+                </a:solidFill>
+                <a:latin typeface="Arial" charset="0"/>
+                <a:cs typeface="Arial" charset="0"/>
+              </a:defRPr>
+            </a:lvl5pPr>
+            <a:lvl6pPr marL="2514600" indent="-228600" defTabSz="1443038" eaLnBrk="0" fontAlgn="base" hangingPunct="0">
+              <a:spcBef>
+                <a:spcPct val="0"/>
+              </a:spcBef>
+              <a:spcAft>
+                <a:spcPct val="0"/>
+              </a:spcAft>
+              <a:defRPr sz="2900">
+                <a:solidFill>
+                  <a:schemeClr val="tx1"/>
+                </a:solidFill>
+                <a:latin typeface="Arial" charset="0"/>
+                <a:cs typeface="Arial" charset="0"/>
+              </a:defRPr>
+            </a:lvl6pPr>
+            <a:lvl7pPr marL="2971800" indent="-228600" defTabSz="1443038" eaLnBrk="0" fontAlgn="base" hangingPunct="0">
+              <a:spcBef>
+                <a:spcPct val="0"/>
+              </a:spcBef>
+              <a:spcAft>
+                <a:spcPct val="0"/>
+              </a:spcAft>
+              <a:defRPr sz="2900">
+                <a:solidFill>
+                  <a:schemeClr val="tx1"/>
+                </a:solidFill>
+                <a:latin typeface="Arial" charset="0"/>
+                <a:cs typeface="Arial" charset="0"/>
+              </a:defRPr>
+            </a:lvl7pPr>
+            <a:lvl8pPr marL="3429000" indent="-228600" defTabSz="1443038" eaLnBrk="0" fontAlgn="base" hangingPunct="0">
+              <a:spcBef>
+                <a:spcPct val="0"/>
+              </a:spcBef>
+              <a:spcAft>
+                <a:spcPct val="0"/>
+              </a:spcAft>
+              <a:defRPr sz="2900">
+                <a:solidFill>
+                  <a:schemeClr val="tx1"/>
+                </a:solidFill>
+                <a:latin typeface="Arial" charset="0"/>
+                <a:cs typeface="Arial" charset="0"/>
+              </a:defRPr>
+            </a:lvl8pPr>
+            <a:lvl9pPr marL="3886200" indent="-228600" defTabSz="1443038" eaLnBrk="0" fontAlgn="base" hangingPunct="0">
+              <a:spcBef>
+                <a:spcPct val="0"/>
+              </a:spcBef>
+              <a:spcAft>
+                <a:spcPct val="0"/>
+              </a:spcAft>
+              <a:defRPr sz="2900">
+                <a:solidFill>
+                  <a:schemeClr val="tx1"/>
+                </a:solidFill>
+                <a:latin typeface="Arial" charset="0"/>
+                <a:cs typeface="Arial" charset="0"/>
+              </a:defRPr>
+            </a:lvl9pPr>
+          </a:lstStyle>
+          <a:p>
+            <a:pPr algn="ctr" eaLnBrk="1" hangingPunct="1"/>
+            <a:r>
+              <a:rPr lang="es-VE" altLang="es-VE" sz="2400" i="1" dirty="0" smtClean="0">
+                <a:latin typeface="Times New Roman" pitchFamily="18" charset="0"/>
+                <a:cs typeface="Times New Roman" pitchFamily="18" charset="0"/>
+              </a:rPr>
+              <a:t>progreso </a:t>
+            </a:r>
+            <a:r>
+              <a:rPr lang="es-VE" altLang="es-VE" sz="2400" i="1" dirty="0">
+                <a:latin typeface="Times New Roman" pitchFamily="18" charset="0"/>
+                <a:cs typeface="Times New Roman" pitchFamily="18" charset="0"/>
+              </a:rPr>
+              <a:t>se le otorga el grado de</a:t>
+            </a:r>
+            <a:r>
+              <a:rPr lang="es-VE" altLang="es-VE" sz="2400" i="1" dirty="0" smtClean="0">
+                <a:latin typeface="Times New Roman" pitchFamily="18" charset="0"/>
+                <a:cs typeface="Times New Roman" pitchFamily="18" charset="0"/>
+              </a:rPr>
+              <a:t>:</a:t>
+            </a:r>
+            <a:endParaRPr lang="es-VE" altLang="es-VE" sz="2400" i="1" dirty="0">
+              <a:solidFill>
+                <a:srgbClr val="FF0000"/>
+              </a:solidFill>
+              <a:latin typeface="Times New Roman" pitchFamily="18" charset="0"/>
+              <a:cs typeface="Times New Roman" pitchFamily="18" charset="0"/>
+            </a:endParaRPr>
+          </a:p>
+        </p:txBody>
+      </p:sp>
+      <p:sp>
+        <p:nvSpPr>
+          <p:cNvPr id="53" name="74 Rectángulo"/>
+          <p:cNvSpPr>
+            <a:spLocks noChangeArrowheads="1"/>
+          </p:cNvSpPr>
+          <p:nvPr/>
+        </p:nvSpPr>
+        <p:spPr bwMode="auto">
+          <a:xfrm>
+            <a:off x="6396831" y="12118616"/>
+            <a:ext cx="2951163" cy="341672"/>
+          </a:xfrm>
+          <a:prstGeom prst="rect">
+            <a:avLst/>
+          </a:prstGeom>
+          <a:noFill/>
+          <a:ln>
+            <a:noFill/>
+          </a:ln>
+          <a:extLst>
+            <a:ext uri="{909E8E84-426E-40DD-AFC4-6F175D3DCCD1}">
+              <a14:hiddenFill xmlns:a14="http://schemas.microsoft.com/office/drawing/2010/main">
+                <a:solidFill>
+                  <a:srgbClr val="FFFFFF"/>
+                </a:solidFill>
+              </a14:hiddenFill>
+            </a:ext>
+            <a:ext uri="{91240B29-F687-4F45-9708-019B960494DF}">
+              <a14:hiddenLine xmlns:a14="http://schemas.microsoft.com/office/drawing/2010/main" w="9525">
+                <a:solidFill>
+                  <a:srgbClr val="000000"/>
+                </a:solidFill>
+                <a:miter lim="800000"/>
+                <a:headEnd/>
+                <a:tailEnd/>
+              </a14:hiddenLine>
+            </a:ext>
+          </a:extLst>
+        </p:spPr>
+        <p:txBody>
+          <a:bodyPr lIns="79288" tIns="39644" rIns="79288" bIns="39644">
+            <a:spAutoFit/>
+          </a:bodyPr>
+          <a:lstStyle>
+            <a:lvl1pPr>
+              <a:defRPr sz="2900">
+                <a:solidFill>
+                  <a:schemeClr val="tx1"/>
+                </a:solidFill>
+                <a:latin typeface="Arial" charset="0"/>
+                <a:cs typeface="Arial" charset="0"/>
+              </a:defRPr>
+            </a:lvl1pPr>
+            <a:lvl2pPr marL="742950" indent="-285750">
+              <a:defRPr sz="2900">
+                <a:solidFill>
+                  <a:schemeClr val="tx1"/>
+                </a:solidFill>
+                <a:latin typeface="Arial" charset="0"/>
+                <a:cs typeface="Arial" charset="0"/>
+              </a:defRPr>
+            </a:lvl2pPr>
+            <a:lvl3pPr marL="1143000" indent="-228600">
+              <a:defRPr sz="2900">
+                <a:solidFill>
+                  <a:schemeClr val="tx1"/>
+                </a:solidFill>
+                <a:latin typeface="Arial" charset="0"/>
+                <a:cs typeface="Arial" charset="0"/>
+              </a:defRPr>
+            </a:lvl3pPr>
+            <a:lvl4pPr marL="1600200" indent="-228600">
+              <a:defRPr sz="2900">
+                <a:solidFill>
+                  <a:schemeClr val="tx1"/>
+                </a:solidFill>
+                <a:latin typeface="Arial" charset="0"/>
+                <a:cs typeface="Arial" charset="0"/>
+              </a:defRPr>
+            </a:lvl4pPr>
+            <a:lvl5pPr marL="2057400" indent="-228600">
+              <a:defRPr sz="2900">
+                <a:solidFill>
+                  <a:schemeClr val="tx1"/>
+                </a:solidFill>
+                <a:latin typeface="Arial" charset="0"/>
+                <a:cs typeface="Arial" charset="0"/>
+              </a:defRPr>
+            </a:lvl5pPr>
+            <a:lvl6pPr marL="2514600" indent="-228600" defTabSz="1443038" eaLnBrk="0" fontAlgn="base" hangingPunct="0">
+              <a:spcBef>
+                <a:spcPct val="0"/>
+              </a:spcBef>
+              <a:spcAft>
+                <a:spcPct val="0"/>
+              </a:spcAft>
+              <a:defRPr sz="2900">
+                <a:solidFill>
+                  <a:schemeClr val="tx1"/>
+                </a:solidFill>
+                <a:latin typeface="Arial" charset="0"/>
+                <a:cs typeface="Arial" charset="0"/>
+              </a:defRPr>
+            </a:lvl6pPr>
+            <a:lvl7pPr marL="2971800" indent="-228600" defTabSz="1443038" eaLnBrk="0" fontAlgn="base" hangingPunct="0">
+              <a:spcBef>
+                <a:spcPct val="0"/>
+              </a:spcBef>
+              <a:spcAft>
+                <a:spcPct val="0"/>
+              </a:spcAft>
+              <a:defRPr sz="2900">
+                <a:solidFill>
+                  <a:schemeClr val="tx1"/>
+                </a:solidFill>
+                <a:latin typeface="Arial" charset="0"/>
+                <a:cs typeface="Arial" charset="0"/>
+              </a:defRPr>
+            </a:lvl7pPr>
+            <a:lvl8pPr marL="3429000" indent="-228600" defTabSz="1443038" eaLnBrk="0" fontAlgn="base" hangingPunct="0">
+              <a:spcBef>
+                <a:spcPct val="0"/>
+              </a:spcBef>
+              <a:spcAft>
+                <a:spcPct val="0"/>
+              </a:spcAft>
+              <a:defRPr sz="2900">
+                <a:solidFill>
+                  <a:schemeClr val="tx1"/>
+                </a:solidFill>
+                <a:latin typeface="Arial" charset="0"/>
+                <a:cs typeface="Arial" charset="0"/>
+              </a:defRPr>
+            </a:lvl8pPr>
+            <a:lvl9pPr marL="3886200" indent="-228600" defTabSz="1443038" eaLnBrk="0" fontAlgn="base" hangingPunct="0">
+              <a:spcBef>
+                <a:spcPct val="0"/>
+              </a:spcBef>
+              <a:spcAft>
+                <a:spcPct val="0"/>
+              </a:spcAft>
+              <a:defRPr sz="2900">
+                <a:solidFill>
+                  <a:schemeClr val="tx1"/>
+                </a:solidFill>
+                <a:latin typeface="Arial" charset="0"/>
+                <a:cs typeface="Arial" charset="0"/>
+              </a:defRPr>
+            </a:lvl9pPr>
+          </a:lstStyle>
+          <a:p>
+            <a:pPr eaLnBrk="1" hangingPunct="1"/>
+            <a:r>
+              <a:rPr lang="es-VE" altLang="es-VE" sz="1700" i="1" dirty="0" smtClean="0">
+                <a:latin typeface="Times New Roman" pitchFamily="18" charset="0"/>
+                <a:cs typeface="Times New Roman" pitchFamily="18" charset="0"/>
+              </a:rPr>
+              <a:t>Registro </a:t>
+            </a:r>
+            <a:r>
+              <a:rPr lang="es-VE" altLang="es-VE" sz="1700" i="1" dirty="0">
+                <a:latin typeface="Times New Roman" pitchFamily="18" charset="0"/>
+                <a:cs typeface="Times New Roman" pitchFamily="18" charset="0"/>
+              </a:rPr>
+              <a:t>N</a:t>
+            </a:r>
+            <a:r>
+              <a:rPr lang="es-VE" altLang="es-VE" sz="1700" i="1" dirty="0" smtClean="0">
+                <a:latin typeface="Times New Roman" pitchFamily="18" charset="0"/>
+                <a:cs typeface="Times New Roman" pitchFamily="18" charset="0"/>
+              </a:rPr>
+              <a:t>°:</a:t>
+            </a:r>
+            <a:endParaRPr lang="es-VE" altLang="es-VE" dirty="0"/>
+          </a:p>
+        </p:txBody>
+      </p:sp>
+      <p:sp>
+        <p:nvSpPr>
+          <p:cNvPr id="54" name="74 Rectángulo"/>
+          <p:cNvSpPr>
+            <a:spLocks noChangeArrowheads="1"/>
+          </p:cNvSpPr>
+          <p:nvPr/>
+        </p:nvSpPr>
+        <p:spPr bwMode="auto">
+          <a:xfrm>
+            <a:off x="6392167" y="11857038"/>
+            <a:ext cx="2951163" cy="341672"/>
+          </a:xfrm>
+          <a:prstGeom prst="rect">
+            <a:avLst/>
+          </a:prstGeom>
+          <a:noFill/>
+          <a:ln>
+            <a:noFill/>
+          </a:ln>
+          <a:extLst>
+            <a:ext uri="{909E8E84-426E-40DD-AFC4-6F175D3DCCD1}">
+              <a14:hiddenFill xmlns:a14="http://schemas.microsoft.com/office/drawing/2010/main">
+                <a:solidFill>
+                  <a:srgbClr val="FFFFFF"/>
+                </a:solidFill>
+              </a14:hiddenFill>
+            </a:ext>
+            <a:ext uri="{91240B29-F687-4F45-9708-019B960494DF}">
+              <a14:hiddenLine xmlns:a14="http://schemas.microsoft.com/office/drawing/2010/main" w="9525">
+                <a:solidFill>
+                  <a:srgbClr val="000000"/>
+                </a:solidFill>
+                <a:miter lim="800000"/>
+                <a:headEnd/>
+                <a:tailEnd/>
+              </a14:hiddenLine>
+            </a:ext>
+          </a:extLst>
+        </p:spPr>
+        <p:txBody>
+          <a:bodyPr lIns="79288" tIns="39644" rIns="79288" bIns="39644">
+            <a:spAutoFit/>
+          </a:bodyPr>
+          <a:lstStyle>
+            <a:lvl1pPr>
+              <a:defRPr sz="2900">
+                <a:solidFill>
+                  <a:schemeClr val="tx1"/>
+                </a:solidFill>
+                <a:latin typeface="Arial" charset="0"/>
+                <a:cs typeface="Arial" charset="0"/>
+              </a:defRPr>
+            </a:lvl1pPr>
+            <a:lvl2pPr marL="742950" indent="-285750">
+              <a:defRPr sz="2900">
+                <a:solidFill>
+                  <a:schemeClr val="tx1"/>
+                </a:solidFill>
+                <a:latin typeface="Arial" charset="0"/>
+                <a:cs typeface="Arial" charset="0"/>
+              </a:defRPr>
+            </a:lvl2pPr>
+            <a:lvl3pPr marL="1143000" indent="-228600">
+              <a:defRPr sz="2900">
+                <a:solidFill>
+                  <a:schemeClr val="tx1"/>
+                </a:solidFill>
+                <a:latin typeface="Arial" charset="0"/>
+                <a:cs typeface="Arial" charset="0"/>
+              </a:defRPr>
+            </a:lvl3pPr>
+            <a:lvl4pPr marL="1600200" indent="-228600">
+              <a:defRPr sz="2900">
+                <a:solidFill>
+                  <a:schemeClr val="tx1"/>
+                </a:solidFill>
+                <a:latin typeface="Arial" charset="0"/>
+                <a:cs typeface="Arial" charset="0"/>
+              </a:defRPr>
+            </a:lvl4pPr>
+            <a:lvl5pPr marL="2057400" indent="-228600">
+              <a:defRPr sz="2900">
+                <a:solidFill>
+                  <a:schemeClr val="tx1"/>
+                </a:solidFill>
+                <a:latin typeface="Arial" charset="0"/>
+                <a:cs typeface="Arial" charset="0"/>
+              </a:defRPr>
+            </a:lvl5pPr>
+            <a:lvl6pPr marL="2514600" indent="-228600" defTabSz="1443038" eaLnBrk="0" fontAlgn="base" hangingPunct="0">
+              <a:spcBef>
+                <a:spcPct val="0"/>
+              </a:spcBef>
+              <a:spcAft>
+                <a:spcPct val="0"/>
+              </a:spcAft>
+              <a:defRPr sz="2900">
+                <a:solidFill>
+                  <a:schemeClr val="tx1"/>
+                </a:solidFill>
+                <a:latin typeface="Arial" charset="0"/>
+                <a:cs typeface="Arial" charset="0"/>
+              </a:defRPr>
+            </a:lvl6pPr>
+            <a:lvl7pPr marL="2971800" indent="-228600" defTabSz="1443038" eaLnBrk="0" fontAlgn="base" hangingPunct="0">
+              <a:spcBef>
+                <a:spcPct val="0"/>
+              </a:spcBef>
+              <a:spcAft>
+                <a:spcPct val="0"/>
+              </a:spcAft>
+              <a:defRPr sz="2900">
+                <a:solidFill>
+                  <a:schemeClr val="tx1"/>
+                </a:solidFill>
+                <a:latin typeface="Arial" charset="0"/>
+                <a:cs typeface="Arial" charset="0"/>
+              </a:defRPr>
+            </a:lvl7pPr>
+            <a:lvl8pPr marL="3429000" indent="-228600" defTabSz="1443038" eaLnBrk="0" fontAlgn="base" hangingPunct="0">
+              <a:spcBef>
+                <a:spcPct val="0"/>
+              </a:spcBef>
+              <a:spcAft>
+                <a:spcPct val="0"/>
+              </a:spcAft>
+              <a:defRPr sz="2900">
+                <a:solidFill>
+                  <a:schemeClr val="tx1"/>
+                </a:solidFill>
+                <a:latin typeface="Arial" charset="0"/>
+                <a:cs typeface="Arial" charset="0"/>
+              </a:defRPr>
+            </a:lvl8pPr>
+            <a:lvl9pPr marL="3886200" indent="-228600" defTabSz="1443038" eaLnBrk="0" fontAlgn="base" hangingPunct="0">
+              <a:spcBef>
+                <a:spcPct val="0"/>
+              </a:spcBef>
+              <a:spcAft>
+                <a:spcPct val="0"/>
+              </a:spcAft>
+              <a:defRPr sz="2900">
+                <a:solidFill>
+                  <a:schemeClr val="tx1"/>
+                </a:solidFill>
+                <a:latin typeface="Arial" charset="0"/>
+                <a:cs typeface="Arial" charset="0"/>
+              </a:defRPr>
+            </a:lvl9pPr>
+          </a:lstStyle>
+          <a:p>
+            <a:pPr eaLnBrk="1" hangingPunct="1"/>
+            <a:r>
+              <a:rPr lang="es-VE" altLang="es-VE" sz="1700" i="1" dirty="0" smtClean="0">
+                <a:latin typeface="Times New Roman" pitchFamily="18" charset="0"/>
+                <a:cs typeface="Times New Roman" pitchFamily="18" charset="0"/>
+              </a:rPr>
+              <a:t>{{</a:t>
+            </a:r>
+            <a:r>
+              <a:rPr lang="es-VE" altLang="es-VE" sz="1700" i="1" dirty="0" err="1" smtClean="0">
+                <a:latin typeface="Times New Roman" pitchFamily="18" charset="0"/>
+                <a:cs typeface="Times New Roman" pitchFamily="18" charset="0"/>
+              </a:rPr>
+              <a:t>ciudad_fecha</a:t>
+            </a:r>
+            <a:r>
+              <a:rPr lang="es-VE" altLang="es-VE" sz="1700" i="1" dirty="0" smtClean="0">
+                <a:latin typeface="Times New Roman" pitchFamily="18" charset="0"/>
+                <a:cs typeface="Times New Roman" pitchFamily="18" charset="0"/>
+              </a:rPr>
+              <a:t>}}</a:t>
+            </a:r>
+            <a:endParaRPr lang="es-VE" altLang="es-VE" sz="1700" i="1" dirty="0">
+              <a:latin typeface="Times New Roman" pitchFamily="18" charset="0"/>
+              <a:cs typeface="Times New Roman" pitchFamily="18" charset="0"/>
+            </a:endParaRPr>
+          </a:p>
+        </p:txBody>
+      </p:sp>
+      <p:sp>
+        <p:nvSpPr>
+          <p:cNvPr id="55" name="74 Rectángulo"/>
+          <p:cNvSpPr>
+            <a:spLocks noChangeArrowheads="1"/>
+          </p:cNvSpPr>
+          <p:nvPr/>
+        </p:nvSpPr>
+        <p:spPr bwMode="auto">
+          <a:xfrm>
+            <a:off x="7518102" y="12118257"/>
+            <a:ext cx="1987154" cy="341672"/>
+          </a:xfrm>
+          <a:prstGeom prst="rect">
+            <a:avLst/>
+          </a:prstGeom>
+          <a:noFill/>
+          <a:ln>
+            <a:noFill/>
+          </a:ln>
+          <a:extLst>
+            <a:ext uri="{909E8E84-426E-40DD-AFC4-6F175D3DCCD1}">
+              <a14:hiddenFill xmlns:a14="http://schemas.microsoft.com/office/drawing/2010/main">
+                <a:solidFill>
+                  <a:srgbClr val="FFFFFF"/>
+                </a:solidFill>
+              </a14:hiddenFill>
+            </a:ext>
+            <a:ext uri="{91240B29-F687-4F45-9708-019B960494DF}">
+              <a14:hiddenLine xmlns:a14="http://schemas.microsoft.com/office/drawing/2010/main" w="9525">
+                <a:solidFill>
+                  <a:srgbClr val="000000"/>
+                </a:solidFill>
+                <a:miter lim="800000"/>
+                <a:headEnd/>
+                <a:tailEnd/>
+              </a14:hiddenLine>
+            </a:ext>
+          </a:extLst>
+        </p:spPr>
+        <p:txBody>
+          <a:bodyPr wrap="square" lIns="79288" tIns="39644" rIns="79288" bIns="39644">
+            <a:spAutoFit/>
+          </a:bodyPr>
+          <a:lstStyle>
+            <a:lvl1pPr>
+              <a:defRPr sz="2900">
+                <a:solidFill>
+                  <a:schemeClr val="tx1"/>
+                </a:solidFill>
+                <a:latin typeface="Arial" charset="0"/>
+                <a:cs typeface="Arial" charset="0"/>
+              </a:defRPr>
+            </a:lvl1pPr>
+            <a:lvl2pPr marL="742950" indent="-285750">
+              <a:defRPr sz="2900">
+                <a:solidFill>
+                  <a:schemeClr val="tx1"/>
+                </a:solidFill>
+                <a:latin typeface="Arial" charset="0"/>
+                <a:cs typeface="Arial" charset="0"/>
+              </a:defRPr>
+            </a:lvl2pPr>
+            <a:lvl3pPr marL="1143000" indent="-228600">
+              <a:defRPr sz="2900">
+                <a:solidFill>
+                  <a:schemeClr val="tx1"/>
+                </a:solidFill>
+                <a:latin typeface="Arial" charset="0"/>
+                <a:cs typeface="Arial" charset="0"/>
+              </a:defRPr>
+            </a:lvl3pPr>
+            <a:lvl4pPr marL="1600200" indent="-228600">
+              <a:defRPr sz="2900">
+                <a:solidFill>
+                  <a:schemeClr val="tx1"/>
+                </a:solidFill>
+                <a:latin typeface="Arial" charset="0"/>
+                <a:cs typeface="Arial" charset="0"/>
+              </a:defRPr>
+            </a:lvl4pPr>
+            <a:lvl5pPr marL="2057400" indent="-228600">
+              <a:defRPr sz="2900">
+                <a:solidFill>
+                  <a:schemeClr val="tx1"/>
+                </a:solidFill>
+                <a:latin typeface="Arial" charset="0"/>
+                <a:cs typeface="Arial" charset="0"/>
+              </a:defRPr>
+            </a:lvl5pPr>
+            <a:lvl6pPr marL="2514600" indent="-228600" defTabSz="1443038" eaLnBrk="0" fontAlgn="base" hangingPunct="0">
+              <a:spcBef>
+                <a:spcPct val="0"/>
+              </a:spcBef>
+              <a:spcAft>
+                <a:spcPct val="0"/>
+              </a:spcAft>
+              <a:defRPr sz="2900">
+                <a:solidFill>
+                  <a:schemeClr val="tx1"/>
+                </a:solidFill>
+                <a:latin typeface="Arial" charset="0"/>
+                <a:cs typeface="Arial" charset="0"/>
+              </a:defRPr>
+            </a:lvl6pPr>
+            <a:lvl7pPr marL="2971800" indent="-228600" defTabSz="1443038" eaLnBrk="0" fontAlgn="base" hangingPunct="0">
+              <a:spcBef>
+                <a:spcPct val="0"/>
+              </a:spcBef>
+              <a:spcAft>
+                <a:spcPct val="0"/>
+              </a:spcAft>
+              <a:defRPr sz="2900">
+                <a:solidFill>
+                  <a:schemeClr val="tx1"/>
+                </a:solidFill>
+                <a:latin typeface="Arial" charset="0"/>
+                <a:cs typeface="Arial" charset="0"/>
+              </a:defRPr>
+            </a:lvl7pPr>
+            <a:lvl8pPr marL="3429000" indent="-228600" defTabSz="1443038" eaLnBrk="0" fontAlgn="base" hangingPunct="0">
+              <a:spcBef>
+                <a:spcPct val="0"/>
+              </a:spcBef>
+              <a:spcAft>
+                <a:spcPct val="0"/>
+              </a:spcAft>
+              <a:defRPr sz="2900">
+                <a:solidFill>
+                  <a:schemeClr val="tx1"/>
+                </a:solidFill>
+                <a:latin typeface="Arial" charset="0"/>
+                <a:cs typeface="Arial" charset="0"/>
+              </a:defRPr>
+            </a:lvl8pPr>
+            <a:lvl9pPr marL="3886200" indent="-228600" defTabSz="1443038" eaLnBrk="0" fontAlgn="base" hangingPunct="0">
+              <a:spcBef>
+                <a:spcPct val="0"/>
+              </a:spcBef>
+              <a:spcAft>
+                <a:spcPct val="0"/>
+              </a:spcAft>
+              <a:defRPr sz="2900">
+                <a:solidFill>
+                  <a:schemeClr val="tx1"/>
+                </a:solidFill>
+                <a:latin typeface="Arial" charset="0"/>
+                <a:cs typeface="Arial" charset="0"/>
+              </a:defRPr>
+            </a:lvl9pPr>
+          </a:lstStyle>
+          <a:p>
+            <a:pPr eaLnBrk="1" hangingPunct="1"/>
+            <a:r>
+              <a:rPr lang="es-VE" altLang="es-VE" sz="1700" i="1" dirty="0" smtClean="0">
+                <a:solidFill>
+                  <a:srgbClr val="FF0000"/>
+                </a:solidFill>
+                <a:latin typeface="Times New Roman" pitchFamily="18" charset="0"/>
+                <a:cs typeface="Times New Roman" pitchFamily="18" charset="0"/>
+              </a:rPr>
+              <a:t>{{registro}}</a:t>
+            </a:r>
+            <a:endParaRPr lang="es-VE" altLang="es-VE" dirty="0"/>
+          </a:p>
+        </p:txBody>
+      </p:sp>
     </p:spTree>
     <p:extLst>
       <p:ext uri="{BB962C8B-B14F-4D97-AF65-F5344CB8AC3E}">
